--- a/docs/architecture.pptx
+++ b/docs/architecture.pptx
@@ -6,9 +6,10 @@
   </p:sldMasterIdLst>
   <p:sldIdLst>
     <p:sldId id="260" r:id="rId2"/>
-    <p:sldId id="261" r:id="rId3"/>
-    <p:sldId id="262" r:id="rId4"/>
-    <p:sldId id="263" r:id="rId5"/>
+    <p:sldId id="264" r:id="rId3"/>
+    <p:sldId id="261" r:id="rId4"/>
+    <p:sldId id="262" r:id="rId5"/>
+    <p:sldId id="263" r:id="rId6"/>
   </p:sldIdLst>
   <p:sldSz cx="12192000" cy="6858000"/>
   <p:notesSz cx="6858000" cy="9144000"/>
@@ -273,7 +274,7 @@
           <a:p>
             <a:fld id="{CEA30D6E-8026-458F-AE61-B945DF15BAB5}" type="datetimeFigureOut">
               <a:rPr lang="fr-FR" smtClean="0"/>
-              <a:t>23/11/2025</a:t>
+              <a:t>28/11/2025</a:t>
             </a:fld>
             <a:endParaRPr lang="fr-FR"/>
           </a:p>
@@ -471,7 +472,7 @@
           <a:p>
             <a:fld id="{CEA30D6E-8026-458F-AE61-B945DF15BAB5}" type="datetimeFigureOut">
               <a:rPr lang="fr-FR" smtClean="0"/>
-              <a:t>23/11/2025</a:t>
+              <a:t>28/11/2025</a:t>
             </a:fld>
             <a:endParaRPr lang="fr-FR"/>
           </a:p>
@@ -679,7 +680,7 @@
           <a:p>
             <a:fld id="{CEA30D6E-8026-458F-AE61-B945DF15BAB5}" type="datetimeFigureOut">
               <a:rPr lang="fr-FR" smtClean="0"/>
-              <a:t>23/11/2025</a:t>
+              <a:t>28/11/2025</a:t>
             </a:fld>
             <a:endParaRPr lang="fr-FR"/>
           </a:p>
@@ -877,7 +878,7 @@
           <a:p>
             <a:fld id="{CEA30D6E-8026-458F-AE61-B945DF15BAB5}" type="datetimeFigureOut">
               <a:rPr lang="fr-FR" smtClean="0"/>
-              <a:t>23/11/2025</a:t>
+              <a:t>28/11/2025</a:t>
             </a:fld>
             <a:endParaRPr lang="fr-FR"/>
           </a:p>
@@ -1152,7 +1153,7 @@
           <a:p>
             <a:fld id="{CEA30D6E-8026-458F-AE61-B945DF15BAB5}" type="datetimeFigureOut">
               <a:rPr lang="fr-FR" smtClean="0"/>
-              <a:t>23/11/2025</a:t>
+              <a:t>28/11/2025</a:t>
             </a:fld>
             <a:endParaRPr lang="fr-FR"/>
           </a:p>
@@ -1417,7 +1418,7 @@
           <a:p>
             <a:fld id="{CEA30D6E-8026-458F-AE61-B945DF15BAB5}" type="datetimeFigureOut">
               <a:rPr lang="fr-FR" smtClean="0"/>
-              <a:t>23/11/2025</a:t>
+              <a:t>28/11/2025</a:t>
             </a:fld>
             <a:endParaRPr lang="fr-FR"/>
           </a:p>
@@ -1829,7 +1830,7 @@
           <a:p>
             <a:fld id="{CEA30D6E-8026-458F-AE61-B945DF15BAB5}" type="datetimeFigureOut">
               <a:rPr lang="fr-FR" smtClean="0"/>
-              <a:t>23/11/2025</a:t>
+              <a:t>28/11/2025</a:t>
             </a:fld>
             <a:endParaRPr lang="fr-FR"/>
           </a:p>
@@ -1970,7 +1971,7 @@
           <a:p>
             <a:fld id="{CEA30D6E-8026-458F-AE61-B945DF15BAB5}" type="datetimeFigureOut">
               <a:rPr lang="fr-FR" smtClean="0"/>
-              <a:t>23/11/2025</a:t>
+              <a:t>28/11/2025</a:t>
             </a:fld>
             <a:endParaRPr lang="fr-FR"/>
           </a:p>
@@ -2083,7 +2084,7 @@
           <a:p>
             <a:fld id="{CEA30D6E-8026-458F-AE61-B945DF15BAB5}" type="datetimeFigureOut">
               <a:rPr lang="fr-FR" smtClean="0"/>
-              <a:t>23/11/2025</a:t>
+              <a:t>28/11/2025</a:t>
             </a:fld>
             <a:endParaRPr lang="fr-FR"/>
           </a:p>
@@ -2394,7 +2395,7 @@
           <a:p>
             <a:fld id="{CEA30D6E-8026-458F-AE61-B945DF15BAB5}" type="datetimeFigureOut">
               <a:rPr lang="fr-FR" smtClean="0"/>
-              <a:t>23/11/2025</a:t>
+              <a:t>28/11/2025</a:t>
             </a:fld>
             <a:endParaRPr lang="fr-FR"/>
           </a:p>
@@ -2682,7 +2683,7 @@
           <a:p>
             <a:fld id="{CEA30D6E-8026-458F-AE61-B945DF15BAB5}" type="datetimeFigureOut">
               <a:rPr lang="fr-FR" smtClean="0"/>
-              <a:t>23/11/2025</a:t>
+              <a:t>28/11/2025</a:t>
             </a:fld>
             <a:endParaRPr lang="fr-FR"/>
           </a:p>
@@ -2923,7 +2924,7 @@
           <a:p>
             <a:fld id="{CEA30D6E-8026-458F-AE61-B945DF15BAB5}" type="datetimeFigureOut">
               <a:rPr lang="fr-FR" smtClean="0"/>
-              <a:t>23/11/2025</a:t>
+              <a:t>28/11/2025</a:t>
             </a:fld>
             <a:endParaRPr lang="fr-FR"/>
           </a:p>
@@ -3890,7 +3891,7 @@
           <a:lstStyle/>
           <a:p>
             <a:pPr algn="ctr"/>
-            <a:endParaRPr lang="fr-FR">
+            <a:endParaRPr lang="fr-FR" dirty="0">
               <a:solidFill>
                 <a:schemeClr val="tx1"/>
               </a:solidFill>
@@ -3941,7 +3942,7 @@
           <a:lstStyle/>
           <a:p>
             <a:pPr algn="ctr"/>
-            <a:endParaRPr lang="fr-FR">
+            <a:endParaRPr lang="fr-FR" dirty="0">
               <a:solidFill>
                 <a:schemeClr val="tx1"/>
               </a:solidFill>
@@ -4057,7 +4058,7 @@
           <a:lstStyle/>
           <a:p>
             <a:pPr algn="ctr"/>
-            <a:endParaRPr lang="fr-FR">
+            <a:endParaRPr lang="fr-FR" dirty="0">
               <a:solidFill>
                 <a:schemeClr val="tx1"/>
               </a:solidFill>
@@ -4528,7 +4529,7 @@
           <a:lstStyle/>
           <a:p>
             <a:pPr algn="ctr"/>
-            <a:endParaRPr lang="fr-FR">
+            <a:endParaRPr lang="fr-FR" dirty="0">
               <a:solidFill>
                 <a:schemeClr val="tx1"/>
               </a:solidFill>
@@ -4601,12 +4602,55 @@
           </a:p>
         </p:txBody>
       </p:sp>
-      <p:sp>
-        <p:nvSpPr>
-          <p:cNvPr id="23" name="Rectangle : coins arrondis 22">
-            <a:extLst>
-              <a:ext uri="{FF2B5EF4-FFF2-40B4-BE49-F238E27FC236}">
-                <a16:creationId xmlns:a16="http://schemas.microsoft.com/office/drawing/2014/main" id="{76A4345D-1C8D-0416-DD9B-75CF7154B5B1}"/>
+      <p:cxnSp>
+        <p:nvCxnSpPr>
+          <p:cNvPr id="9" name="Connecteur droit avec flèche 8">
+            <a:extLst>
+              <a:ext uri="{FF2B5EF4-FFF2-40B4-BE49-F238E27FC236}">
+                <a16:creationId xmlns:a16="http://schemas.microsoft.com/office/drawing/2014/main" id="{21D68426-51E3-F9C6-218C-A09DB11D384C}"/>
+              </a:ext>
+            </a:extLst>
+          </p:cNvPr>
+          <p:cNvCxnSpPr>
+            <a:cxnSpLocks/>
+            <a:stCxn id="58" idx="2"/>
+            <a:endCxn id="3" idx="0"/>
+          </p:cNvCxnSpPr>
+          <p:nvPr/>
+        </p:nvCxnSpPr>
+        <p:spPr>
+          <a:xfrm>
+            <a:off x="6442800" y="2981325"/>
+            <a:ext cx="0" cy="623635"/>
+          </a:xfrm>
+          <a:prstGeom prst="straightConnector1">
+            <a:avLst/>
+          </a:prstGeom>
+          <a:ln>
+            <a:tailEnd type="triangle"/>
+          </a:ln>
+        </p:spPr>
+        <p:style>
+          <a:lnRef idx="2">
+            <a:schemeClr val="dk1"/>
+          </a:lnRef>
+          <a:fillRef idx="0">
+            <a:schemeClr val="dk1"/>
+          </a:fillRef>
+          <a:effectRef idx="1">
+            <a:schemeClr val="dk1"/>
+          </a:effectRef>
+          <a:fontRef idx="minor">
+            <a:schemeClr val="tx1"/>
+          </a:fontRef>
+        </p:style>
+      </p:cxnSp>
+      <p:sp>
+        <p:nvSpPr>
+          <p:cNvPr id="19" name="Rectangle : coins arrondis 18">
+            <a:extLst>
+              <a:ext uri="{FF2B5EF4-FFF2-40B4-BE49-F238E27FC236}">
+                <a16:creationId xmlns:a16="http://schemas.microsoft.com/office/drawing/2014/main" id="{2AB85A98-32E3-6593-ACC1-B34750D1AC39}"/>
               </a:ext>
             </a:extLst>
           </p:cNvPr>
@@ -4615,8 +4659,8 @@
         </p:nvSpPr>
         <p:spPr>
           <a:xfrm>
-            <a:off x="8558658" y="3166572"/>
-            <a:ext cx="1119664" cy="256991"/>
+            <a:off x="3267075" y="4536428"/>
+            <a:ext cx="1316326" cy="540000"/>
           </a:xfrm>
           <a:prstGeom prst="roundRect">
             <a:avLst/>
@@ -4652,42 +4696,54 @@
           </a:fontRef>
         </p:style>
         <p:txBody>
-          <a:bodyPr rtlCol="0" anchor="ctr"/>
-          <a:lstStyle/>
-          <a:p>
+          <a:bodyPr rtlCol="0" anchor="t"/>
+          <a:lstStyle/>
+          <a:p>
+            <a:pPr algn="ctr"/>
+            <a:r>
+              <a:rPr lang="fr-FR" sz="1000" b="1" dirty="0">
+                <a:solidFill>
+                  <a:schemeClr val="tx1"/>
+                </a:solidFill>
+              </a:rPr>
+              <a:t>TASK </a:t>
+            </a:r>
+          </a:p>
+          <a:p>
+            <a:pPr algn="ctr"/>
             <a:r>
               <a:rPr lang="fr-FR" sz="1000" dirty="0">
                 <a:solidFill>
                   <a:schemeClr val="tx1"/>
                 </a:solidFill>
               </a:rPr>
-              <a:t>Image détordue</a:t>
+              <a:t>Record vidéo</a:t>
             </a:r>
           </a:p>
         </p:txBody>
       </p:sp>
       <p:cxnSp>
         <p:nvCxnSpPr>
-          <p:cNvPr id="9" name="Connecteur droit avec flèche 8">
-            <a:extLst>
-              <a:ext uri="{FF2B5EF4-FFF2-40B4-BE49-F238E27FC236}">
-                <a16:creationId xmlns:a16="http://schemas.microsoft.com/office/drawing/2014/main" id="{21D68426-51E3-F9C6-218C-A09DB11D384C}"/>
+          <p:cNvPr id="26" name="Connecteur : en angle 25">
+            <a:extLst>
+              <a:ext uri="{FF2B5EF4-FFF2-40B4-BE49-F238E27FC236}">
+                <a16:creationId xmlns:a16="http://schemas.microsoft.com/office/drawing/2014/main" id="{BD4E4805-01E2-4408-5075-726F5878908E}"/>
               </a:ext>
             </a:extLst>
           </p:cNvPr>
           <p:cNvCxnSpPr>
             <a:cxnSpLocks/>
             <a:stCxn id="58" idx="2"/>
-            <a:endCxn id="3" idx="0"/>
+            <a:endCxn id="74" idx="0"/>
           </p:cNvCxnSpPr>
           <p:nvPr/>
         </p:nvCxnSpPr>
         <p:spPr>
-          <a:xfrm>
-            <a:off x="6442800" y="2981325"/>
-            <a:ext cx="0" cy="623635"/>
-          </a:xfrm>
-          <a:prstGeom prst="straightConnector1">
+          <a:xfrm rot="5400000">
+            <a:off x="4472658" y="1634817"/>
+            <a:ext cx="623635" cy="3316650"/>
+          </a:xfrm>
+          <a:prstGeom prst="bentConnector3">
             <a:avLst/>
           </a:prstGeom>
           <a:ln>
@@ -4711,10 +4767,47 @@
       </p:cxnSp>
       <p:sp>
         <p:nvSpPr>
-          <p:cNvPr id="19" name="Rectangle : coins arrondis 18">
-            <a:extLst>
-              <a:ext uri="{FF2B5EF4-FFF2-40B4-BE49-F238E27FC236}">
-                <a16:creationId xmlns:a16="http://schemas.microsoft.com/office/drawing/2014/main" id="{2AB85A98-32E3-6593-ACC1-B34750D1AC39}"/>
+          <p:cNvPr id="29" name="ZoneTexte 28">
+            <a:extLst>
+              <a:ext uri="{FF2B5EF4-FFF2-40B4-BE49-F238E27FC236}">
+                <a16:creationId xmlns:a16="http://schemas.microsoft.com/office/drawing/2014/main" id="{58CDE725-1D84-6219-A3B0-30CF0937AFFF}"/>
+              </a:ext>
+            </a:extLst>
+          </p:cNvPr>
+          <p:cNvSpPr txBox="1"/>
+          <p:nvPr/>
+        </p:nvSpPr>
+        <p:spPr>
+          <a:xfrm>
+            <a:off x="133350" y="93127"/>
+            <a:ext cx="3714750" cy="461665"/>
+          </a:xfrm>
+          <a:prstGeom prst="rect">
+            <a:avLst/>
+          </a:prstGeom>
+          <a:noFill/>
+        </p:spPr>
+        <p:txBody>
+          <a:bodyPr wrap="square" rtlCol="0">
+            <a:spAutoFit/>
+          </a:bodyPr>
+          <a:lstStyle/>
+          <a:p>
+            <a:r>
+              <a:rPr lang="fr-FR" sz="2400" dirty="0">
+                <a:latin typeface="Raleway" pitchFamily="2" charset="0"/>
+              </a:rPr>
+              <a:t>Architecture software</a:t>
+            </a:r>
+          </a:p>
+        </p:txBody>
+      </p:sp>
+      <p:sp>
+        <p:nvSpPr>
+          <p:cNvPr id="23" name="Rectangle : coins arrondis 22">
+            <a:extLst>
+              <a:ext uri="{FF2B5EF4-FFF2-40B4-BE49-F238E27FC236}">
+                <a16:creationId xmlns:a16="http://schemas.microsoft.com/office/drawing/2014/main" id="{76A4345D-1C8D-0416-DD9B-75CF7154B5B1}"/>
               </a:ext>
             </a:extLst>
           </p:cNvPr>
@@ -4723,8 +4816,8 @@
         </p:nvSpPr>
         <p:spPr>
           <a:xfrm>
-            <a:off x="3267075" y="4536428"/>
-            <a:ext cx="1316326" cy="540000"/>
+            <a:off x="3574846" y="3124544"/>
+            <a:ext cx="1119664" cy="256991"/>
           </a:xfrm>
           <a:prstGeom prst="roundRect">
             <a:avLst/>
@@ -4760,57 +4853,241 @@
           </a:fontRef>
         </p:style>
         <p:txBody>
-          <a:bodyPr rtlCol="0" anchor="t"/>
-          <a:lstStyle/>
-          <a:p>
-            <a:pPr algn="ctr"/>
-            <a:r>
-              <a:rPr lang="fr-FR" sz="1000" b="1" dirty="0">
-                <a:solidFill>
-                  <a:schemeClr val="tx1"/>
-                </a:solidFill>
-              </a:rPr>
-              <a:t>TASK </a:t>
-            </a:r>
-          </a:p>
-          <a:p>
-            <a:pPr algn="ctr"/>
+          <a:bodyPr rtlCol="0" anchor="ctr"/>
+          <a:lstStyle/>
+          <a:p>
             <a:r>
               <a:rPr lang="fr-FR" sz="1000" dirty="0">
                 <a:solidFill>
                   <a:schemeClr val="tx1"/>
                 </a:solidFill>
               </a:rPr>
-              <a:t>Record vidéo</a:t>
+              <a:t>Image détordue</a:t>
+            </a:r>
+          </a:p>
+        </p:txBody>
+      </p:sp>
+    </p:spTree>
+    <p:extLst>
+      <p:ext uri="{BB962C8B-B14F-4D97-AF65-F5344CB8AC3E}">
+        <p14:creationId xmlns:p14="http://schemas.microsoft.com/office/powerpoint/2010/main" val="1207860193"/>
+      </p:ext>
+    </p:extLst>
+  </p:cSld>
+  <p:clrMapOvr>
+    <a:masterClrMapping/>
+  </p:clrMapOvr>
+</p:sld>
+</file>
+
+<file path=ppt/slides/slide2.xml><?xml version="1.0" encoding="utf-8"?>
+<p:sld xmlns:a="http://schemas.openxmlformats.org/drawingml/2006/main" xmlns:r="http://schemas.openxmlformats.org/officeDocument/2006/relationships" xmlns:p="http://schemas.openxmlformats.org/presentationml/2006/main">
+  <p:cSld>
+    <p:spTree>
+      <p:nvGrpSpPr>
+        <p:cNvPr id="1" name="">
+          <a:extLst>
+            <a:ext uri="{FF2B5EF4-FFF2-40B4-BE49-F238E27FC236}">
+              <a16:creationId xmlns:a16="http://schemas.microsoft.com/office/drawing/2014/main" id="{3E3C08CC-1AC1-3377-B415-7DAB6105A995}"/>
+            </a:ext>
+          </a:extLst>
+        </p:cNvPr>
+        <p:cNvGrpSpPr/>
+        <p:nvPr/>
+      </p:nvGrpSpPr>
+      <p:grpSpPr>
+        <a:xfrm>
+          <a:off x="0" y="0"/>
+          <a:ext cx="0" cy="0"/>
+          <a:chOff x="0" y="0"/>
+          <a:chExt cx="0" cy="0"/>
+        </a:xfrm>
+      </p:grpSpPr>
+      <p:sp>
+        <p:nvSpPr>
+          <p:cNvPr id="3" name="Rectangle : coins arrondis 2">
+            <a:extLst>
+              <a:ext uri="{FF2B5EF4-FFF2-40B4-BE49-F238E27FC236}">
+                <a16:creationId xmlns:a16="http://schemas.microsoft.com/office/drawing/2014/main" id="{32D61BB0-C7E8-E478-2F23-92319AF05ACD}"/>
+              </a:ext>
+            </a:extLst>
+          </p:cNvPr>
+          <p:cNvSpPr/>
+          <p:nvPr/>
+        </p:nvSpPr>
+        <p:spPr>
+          <a:xfrm>
+            <a:off x="660113" y="2170597"/>
+            <a:ext cx="1983650" cy="338390"/>
+          </a:xfrm>
+          <a:prstGeom prst="roundRect">
+            <a:avLst>
+              <a:gd name="adj" fmla="val 10474"/>
+            </a:avLst>
+          </a:prstGeom>
+          <a:noFill/>
+          <a:ln w="12700">
+            <a:solidFill>
+              <a:schemeClr val="tx1"/>
+            </a:solidFill>
+          </a:ln>
+          <a:effectLst/>
+        </p:spPr>
+        <p:style>
+          <a:lnRef idx="2">
+            <a:schemeClr val="accent1">
+              <a:shade val="15000"/>
+            </a:schemeClr>
+          </a:lnRef>
+          <a:fillRef idx="1">
+            <a:schemeClr val="accent1"/>
+          </a:fillRef>
+          <a:effectRef idx="0">
+            <a:schemeClr val="accent1"/>
+          </a:effectRef>
+          <a:fontRef idx="minor">
+            <a:schemeClr val="lt1"/>
+          </a:fontRef>
+        </p:style>
+        <p:txBody>
+          <a:bodyPr rtlCol="0" anchor="ctr"/>
+          <a:lstStyle/>
+          <a:p>
+            <a:pPr algn="ctr"/>
+            <a:r>
+              <a:rPr lang="fr-FR" sz="1000" dirty="0">
+                <a:solidFill>
+                  <a:schemeClr val="tx1"/>
+                </a:solidFill>
+              </a:rPr>
+              <a:t>Conversion en noir et blanc</a:t>
+            </a:r>
+          </a:p>
+        </p:txBody>
+      </p:sp>
+      <p:sp>
+        <p:nvSpPr>
+          <p:cNvPr id="2" name="ZoneTexte 1">
+            <a:extLst>
+              <a:ext uri="{FF2B5EF4-FFF2-40B4-BE49-F238E27FC236}">
+                <a16:creationId xmlns:a16="http://schemas.microsoft.com/office/drawing/2014/main" id="{8680B6DD-31A5-BE5F-618B-5047CE152459}"/>
+              </a:ext>
+            </a:extLst>
+          </p:cNvPr>
+          <p:cNvSpPr txBox="1"/>
+          <p:nvPr/>
+        </p:nvSpPr>
+        <p:spPr>
+          <a:xfrm>
+            <a:off x="133350" y="93127"/>
+            <a:ext cx="3714750" cy="461665"/>
+          </a:xfrm>
+          <a:prstGeom prst="rect">
+            <a:avLst/>
+          </a:prstGeom>
+          <a:noFill/>
+        </p:spPr>
+        <p:txBody>
+          <a:bodyPr wrap="square" rtlCol="0">
+            <a:spAutoFit/>
+          </a:bodyPr>
+          <a:lstStyle/>
+          <a:p>
+            <a:r>
+              <a:rPr lang="fr-FR" sz="2400" dirty="0">
+                <a:latin typeface="Raleway" pitchFamily="2" charset="0"/>
+              </a:rPr>
+              <a:t>Traitement de l’image</a:t>
+            </a:r>
+          </a:p>
+        </p:txBody>
+      </p:sp>
+      <p:sp>
+        <p:nvSpPr>
+          <p:cNvPr id="5" name="Rectangle : coins arrondis 4">
+            <a:extLst>
+              <a:ext uri="{FF2B5EF4-FFF2-40B4-BE49-F238E27FC236}">
+                <a16:creationId xmlns:a16="http://schemas.microsoft.com/office/drawing/2014/main" id="{3549BABE-D9E3-00A2-6F4F-A20499C03336}"/>
+              </a:ext>
+            </a:extLst>
+          </p:cNvPr>
+          <p:cNvSpPr/>
+          <p:nvPr/>
+        </p:nvSpPr>
+        <p:spPr>
+          <a:xfrm>
+            <a:off x="660113" y="2925357"/>
+            <a:ext cx="1983650" cy="338390"/>
+          </a:xfrm>
+          <a:prstGeom prst="roundRect">
+            <a:avLst>
+              <a:gd name="adj" fmla="val 10474"/>
+            </a:avLst>
+          </a:prstGeom>
+          <a:noFill/>
+          <a:ln w="12700">
+            <a:solidFill>
+              <a:schemeClr val="tx1"/>
+            </a:solidFill>
+          </a:ln>
+          <a:effectLst/>
+        </p:spPr>
+        <p:style>
+          <a:lnRef idx="2">
+            <a:schemeClr val="accent1">
+              <a:shade val="15000"/>
+            </a:schemeClr>
+          </a:lnRef>
+          <a:fillRef idx="1">
+            <a:schemeClr val="accent1"/>
+          </a:fillRef>
+          <a:effectRef idx="0">
+            <a:schemeClr val="accent1"/>
+          </a:effectRef>
+          <a:fontRef idx="minor">
+            <a:schemeClr val="lt1"/>
+          </a:fontRef>
+        </p:style>
+        <p:txBody>
+          <a:bodyPr rtlCol="0" anchor="ctr"/>
+          <a:lstStyle/>
+          <a:p>
+            <a:pPr algn="ctr"/>
+            <a:r>
+              <a:rPr lang="fr-FR" sz="1000" dirty="0">
+                <a:solidFill>
+                  <a:schemeClr val="tx1"/>
+                </a:solidFill>
+              </a:rPr>
+              <a:t>Filtre coupe bande gris</a:t>
             </a:r>
           </a:p>
         </p:txBody>
       </p:sp>
       <p:cxnSp>
         <p:nvCxnSpPr>
-          <p:cNvPr id="26" name="Connecteur : en angle 25">
-            <a:extLst>
-              <a:ext uri="{FF2B5EF4-FFF2-40B4-BE49-F238E27FC236}">
-                <a16:creationId xmlns:a16="http://schemas.microsoft.com/office/drawing/2014/main" id="{BD4E4805-01E2-4408-5075-726F5878908E}"/>
+          <p:cNvPr id="7" name="Connecteur droit avec flèche 6">
+            <a:extLst>
+              <a:ext uri="{FF2B5EF4-FFF2-40B4-BE49-F238E27FC236}">
+                <a16:creationId xmlns:a16="http://schemas.microsoft.com/office/drawing/2014/main" id="{653F530B-E305-ED94-99FF-1720028CCA32}"/>
               </a:ext>
             </a:extLst>
           </p:cNvPr>
           <p:cNvCxnSpPr>
-            <a:cxnSpLocks/>
-            <a:stCxn id="58" idx="2"/>
-            <a:endCxn id="74" idx="0"/>
+            <a:stCxn id="3" idx="2"/>
+            <a:endCxn id="5" idx="0"/>
           </p:cNvCxnSpPr>
           <p:nvPr/>
         </p:nvCxnSpPr>
         <p:spPr>
-          <a:xfrm rot="5400000">
-            <a:off x="4472658" y="1634817"/>
-            <a:ext cx="623635" cy="3316650"/>
-          </a:xfrm>
-          <a:prstGeom prst="bentConnector3">
+          <a:xfrm>
+            <a:off x="1651938" y="2508987"/>
+            <a:ext cx="0" cy="416370"/>
+          </a:xfrm>
+          <a:prstGeom prst="straightConnector1">
             <a:avLst/>
           </a:prstGeom>
-          <a:ln>
+          <a:ln w="12700">
             <a:tailEnd type="triangle"/>
           </a:ln>
         </p:spPr>
@@ -4831,45 +5108,323 @@
       </p:cxnSp>
       <p:sp>
         <p:nvSpPr>
-          <p:cNvPr id="29" name="ZoneTexte 28">
-            <a:extLst>
-              <a:ext uri="{FF2B5EF4-FFF2-40B4-BE49-F238E27FC236}">
-                <a16:creationId xmlns:a16="http://schemas.microsoft.com/office/drawing/2014/main" id="{58CDE725-1D84-6219-A3B0-30CF0937AFFF}"/>
-              </a:ext>
-            </a:extLst>
-          </p:cNvPr>
-          <p:cNvSpPr txBox="1"/>
+          <p:cNvPr id="8" name="Rectangle : coins arrondis 7">
+            <a:extLst>
+              <a:ext uri="{FF2B5EF4-FFF2-40B4-BE49-F238E27FC236}">
+                <a16:creationId xmlns:a16="http://schemas.microsoft.com/office/drawing/2014/main" id="{0C552861-18B0-57D4-5007-4D1D1AC3D28E}"/>
+              </a:ext>
+            </a:extLst>
+          </p:cNvPr>
+          <p:cNvSpPr/>
           <p:nvPr/>
         </p:nvSpPr>
         <p:spPr>
           <a:xfrm>
-            <a:off x="133350" y="93127"/>
-            <a:ext cx="3714750" cy="461665"/>
-          </a:xfrm>
-          <a:prstGeom prst="rect">
+            <a:off x="660113" y="3680117"/>
+            <a:ext cx="1983650" cy="338390"/>
+          </a:xfrm>
+          <a:prstGeom prst="roundRect">
+            <a:avLst>
+              <a:gd name="adj" fmla="val 10474"/>
+            </a:avLst>
+          </a:prstGeom>
+          <a:noFill/>
+          <a:ln w="12700">
+            <a:solidFill>
+              <a:schemeClr val="tx1"/>
+            </a:solidFill>
+          </a:ln>
+          <a:effectLst/>
+        </p:spPr>
+        <p:style>
+          <a:lnRef idx="2">
+            <a:schemeClr val="accent1">
+              <a:shade val="15000"/>
+            </a:schemeClr>
+          </a:lnRef>
+          <a:fillRef idx="1">
+            <a:schemeClr val="accent1"/>
+          </a:fillRef>
+          <a:effectRef idx="0">
+            <a:schemeClr val="accent1"/>
+          </a:effectRef>
+          <a:fontRef idx="minor">
+            <a:schemeClr val="lt1"/>
+          </a:fontRef>
+        </p:style>
+        <p:txBody>
+          <a:bodyPr rtlCol="0" anchor="ctr"/>
+          <a:lstStyle/>
+          <a:p>
+            <a:pPr algn="ctr"/>
+            <a:r>
+              <a:rPr lang="fr-FR" sz="1000" dirty="0">
+                <a:solidFill>
+                  <a:schemeClr val="tx1"/>
+                </a:solidFill>
+              </a:rPr>
+              <a:t>Redressement de l’image</a:t>
+            </a:r>
+          </a:p>
+        </p:txBody>
+      </p:sp>
+      <p:cxnSp>
+        <p:nvCxnSpPr>
+          <p:cNvPr id="12" name="Connecteur droit avec flèche 11">
+            <a:extLst>
+              <a:ext uri="{FF2B5EF4-FFF2-40B4-BE49-F238E27FC236}">
+                <a16:creationId xmlns:a16="http://schemas.microsoft.com/office/drawing/2014/main" id="{B5AF0E33-7D31-6B41-3E42-833116863F08}"/>
+              </a:ext>
+            </a:extLst>
+          </p:cNvPr>
+          <p:cNvCxnSpPr>
+            <a:cxnSpLocks/>
+            <a:stCxn id="8" idx="2"/>
+            <a:endCxn id="18" idx="0"/>
+          </p:cNvCxnSpPr>
+          <p:nvPr/>
+        </p:nvCxnSpPr>
+        <p:spPr>
+          <a:xfrm>
+            <a:off x="1651938" y="4018507"/>
+            <a:ext cx="0" cy="416371"/>
+          </a:xfrm>
+          <a:prstGeom prst="straightConnector1">
             <a:avLst/>
           </a:prstGeom>
+          <a:ln w="12700">
+            <a:tailEnd type="triangle"/>
+          </a:ln>
+        </p:spPr>
+        <p:style>
+          <a:lnRef idx="2">
+            <a:schemeClr val="dk1"/>
+          </a:lnRef>
+          <a:fillRef idx="0">
+            <a:schemeClr val="dk1"/>
+          </a:fillRef>
+          <a:effectRef idx="1">
+            <a:schemeClr val="dk1"/>
+          </a:effectRef>
+          <a:fontRef idx="minor">
+            <a:schemeClr val="tx1"/>
+          </a:fontRef>
+        </p:style>
+      </p:cxnSp>
+      <p:sp>
+        <p:nvSpPr>
+          <p:cNvPr id="18" name="Rectangle : coins arrondis 17">
+            <a:extLst>
+              <a:ext uri="{FF2B5EF4-FFF2-40B4-BE49-F238E27FC236}">
+                <a16:creationId xmlns:a16="http://schemas.microsoft.com/office/drawing/2014/main" id="{60C38C58-5118-CFFD-163E-CDC3FC8B7AAA}"/>
+              </a:ext>
+            </a:extLst>
+          </p:cNvPr>
+          <p:cNvSpPr/>
+          <p:nvPr/>
+        </p:nvSpPr>
+        <p:spPr>
+          <a:xfrm>
+            <a:off x="660113" y="4434878"/>
+            <a:ext cx="1983650" cy="338390"/>
+          </a:xfrm>
+          <a:prstGeom prst="roundRect">
+            <a:avLst>
+              <a:gd name="adj" fmla="val 10474"/>
+            </a:avLst>
+          </a:prstGeom>
           <a:noFill/>
-        </p:spPr>
-        <p:txBody>
-          <a:bodyPr wrap="square" rtlCol="0">
-            <a:spAutoFit/>
-          </a:bodyPr>
-          <a:lstStyle/>
-          <a:p>
-            <a:r>
-              <a:rPr lang="fr-FR" sz="2400" dirty="0">
-                <a:latin typeface="Raleway" pitchFamily="2" charset="0"/>
+          <a:ln w="12700">
+            <a:solidFill>
+              <a:schemeClr val="tx1"/>
+            </a:solidFill>
+          </a:ln>
+          <a:effectLst/>
+        </p:spPr>
+        <p:style>
+          <a:lnRef idx="2">
+            <a:schemeClr val="accent1">
+              <a:shade val="15000"/>
+            </a:schemeClr>
+          </a:lnRef>
+          <a:fillRef idx="1">
+            <a:schemeClr val="accent1"/>
+          </a:fillRef>
+          <a:effectRef idx="0">
+            <a:schemeClr val="accent1"/>
+          </a:effectRef>
+          <a:fontRef idx="minor">
+            <a:schemeClr val="lt1"/>
+          </a:fontRef>
+        </p:style>
+        <p:txBody>
+          <a:bodyPr rtlCol="0" anchor="ctr"/>
+          <a:lstStyle/>
+          <a:p>
+            <a:pPr algn="ctr"/>
+            <a:r>
+              <a:rPr lang="fr-FR" sz="1000" dirty="0">
+                <a:solidFill>
+                  <a:schemeClr val="tx1"/>
+                </a:solidFill>
               </a:rPr>
-              <a:t>Architecture software</a:t>
-            </a:r>
-          </a:p>
-        </p:txBody>
-      </p:sp>
+              <a:t>Distorsion de l’image</a:t>
+            </a:r>
+          </a:p>
+        </p:txBody>
+      </p:sp>
+      <p:cxnSp>
+        <p:nvCxnSpPr>
+          <p:cNvPr id="20" name="Connecteur droit avec flèche 19">
+            <a:extLst>
+              <a:ext uri="{FF2B5EF4-FFF2-40B4-BE49-F238E27FC236}">
+                <a16:creationId xmlns:a16="http://schemas.microsoft.com/office/drawing/2014/main" id="{872E6A03-65D8-FD00-3D47-61A1C978A0B9}"/>
+              </a:ext>
+            </a:extLst>
+          </p:cNvPr>
+          <p:cNvCxnSpPr>
+            <a:cxnSpLocks/>
+            <a:stCxn id="5" idx="2"/>
+            <a:endCxn id="8" idx="0"/>
+          </p:cNvCxnSpPr>
+          <p:nvPr/>
+        </p:nvCxnSpPr>
+        <p:spPr>
+          <a:xfrm>
+            <a:off x="1651938" y="3263747"/>
+            <a:ext cx="0" cy="416370"/>
+          </a:xfrm>
+          <a:prstGeom prst="straightConnector1">
+            <a:avLst/>
+          </a:prstGeom>
+          <a:ln w="12700">
+            <a:tailEnd type="triangle"/>
+          </a:ln>
+        </p:spPr>
+        <p:style>
+          <a:lnRef idx="2">
+            <a:schemeClr val="dk1"/>
+          </a:lnRef>
+          <a:fillRef idx="0">
+            <a:schemeClr val="dk1"/>
+          </a:fillRef>
+          <a:effectRef idx="1">
+            <a:schemeClr val="dk1"/>
+          </a:effectRef>
+          <a:fontRef idx="minor">
+            <a:schemeClr val="tx1"/>
+          </a:fontRef>
+        </p:style>
+      </p:cxnSp>
+      <p:sp>
+        <p:nvSpPr>
+          <p:cNvPr id="28" name="Rectangle : coins arrondis 27">
+            <a:extLst>
+              <a:ext uri="{FF2B5EF4-FFF2-40B4-BE49-F238E27FC236}">
+                <a16:creationId xmlns:a16="http://schemas.microsoft.com/office/drawing/2014/main" id="{A5E986BA-1C23-D677-4A5C-A9075E991AF5}"/>
+              </a:ext>
+            </a:extLst>
+          </p:cNvPr>
+          <p:cNvSpPr/>
+          <p:nvPr/>
+        </p:nvSpPr>
+        <p:spPr>
+          <a:xfrm>
+            <a:off x="660113" y="1415837"/>
+            <a:ext cx="1983650" cy="338390"/>
+          </a:xfrm>
+          <a:prstGeom prst="roundRect">
+            <a:avLst>
+              <a:gd name="adj" fmla="val 10474"/>
+            </a:avLst>
+          </a:prstGeom>
+          <a:noFill/>
+          <a:ln w="12700">
+            <a:solidFill>
+              <a:schemeClr val="tx1"/>
+            </a:solidFill>
+          </a:ln>
+          <a:effectLst/>
+        </p:spPr>
+        <p:style>
+          <a:lnRef idx="2">
+            <a:schemeClr val="accent1">
+              <a:shade val="15000"/>
+            </a:schemeClr>
+          </a:lnRef>
+          <a:fillRef idx="1">
+            <a:schemeClr val="accent1"/>
+          </a:fillRef>
+          <a:effectRef idx="0">
+            <a:schemeClr val="accent1"/>
+          </a:effectRef>
+          <a:fontRef idx="minor">
+            <a:schemeClr val="lt1"/>
+          </a:fontRef>
+        </p:style>
+        <p:txBody>
+          <a:bodyPr rtlCol="0" anchor="ctr"/>
+          <a:lstStyle/>
+          <a:p>
+            <a:pPr algn="ctr"/>
+            <a:r>
+              <a:rPr lang="fr-FR" sz="1000" dirty="0">
+                <a:solidFill>
+                  <a:schemeClr val="tx1"/>
+                </a:solidFill>
+              </a:rPr>
+              <a:t>Correction lumière pourrie</a:t>
+            </a:r>
+          </a:p>
+        </p:txBody>
+      </p:sp>
+      <p:cxnSp>
+        <p:nvCxnSpPr>
+          <p:cNvPr id="30" name="Connecteur droit avec flèche 29">
+            <a:extLst>
+              <a:ext uri="{FF2B5EF4-FFF2-40B4-BE49-F238E27FC236}">
+                <a16:creationId xmlns:a16="http://schemas.microsoft.com/office/drawing/2014/main" id="{4E95FF95-E139-973B-A55B-A70A54243243}"/>
+              </a:ext>
+            </a:extLst>
+          </p:cNvPr>
+          <p:cNvCxnSpPr>
+            <a:cxnSpLocks/>
+            <a:stCxn id="28" idx="2"/>
+            <a:endCxn id="3" idx="0"/>
+          </p:cNvCxnSpPr>
+          <p:nvPr/>
+        </p:nvCxnSpPr>
+        <p:spPr>
+          <a:xfrm>
+            <a:off x="1651938" y="1754227"/>
+            <a:ext cx="0" cy="416370"/>
+          </a:xfrm>
+          <a:prstGeom prst="straightConnector1">
+            <a:avLst/>
+          </a:prstGeom>
+          <a:ln w="12700">
+            <a:tailEnd type="triangle"/>
+          </a:ln>
+        </p:spPr>
+        <p:style>
+          <a:lnRef idx="2">
+            <a:schemeClr val="dk1"/>
+          </a:lnRef>
+          <a:fillRef idx="0">
+            <a:schemeClr val="dk1"/>
+          </a:fillRef>
+          <a:effectRef idx="1">
+            <a:schemeClr val="dk1"/>
+          </a:effectRef>
+          <a:fontRef idx="minor">
+            <a:schemeClr val="tx1"/>
+          </a:fontRef>
+        </p:style>
+      </p:cxnSp>
     </p:spTree>
     <p:extLst>
       <p:ext uri="{BB962C8B-B14F-4D97-AF65-F5344CB8AC3E}">
-        <p14:creationId xmlns:p14="http://schemas.microsoft.com/office/powerpoint/2010/main" val="1207860193"/>
+        <p14:creationId xmlns:p14="http://schemas.microsoft.com/office/powerpoint/2010/main" val="1876375741"/>
       </p:ext>
     </p:extLst>
   </p:cSld>
@@ -4879,7 +5434,7 @@
 </p:sld>
 </file>
 
-<file path=ppt/slides/slide2.xml><?xml version="1.0" encoding="utf-8"?>
+<file path=ppt/slides/slide3.xml><?xml version="1.0" encoding="utf-8"?>
 <p:sld xmlns:a="http://schemas.openxmlformats.org/drawingml/2006/main" xmlns:r="http://schemas.openxmlformats.org/officeDocument/2006/relationships" xmlns:p="http://schemas.openxmlformats.org/presentationml/2006/main">
   <p:cSld>
     <p:spTree>
@@ -6009,7 +6564,7 @@
 </p:sld>
 </file>
 
-<file path=ppt/slides/slide3.xml><?xml version="1.0" encoding="utf-8"?>
+<file path=ppt/slides/slide4.xml><?xml version="1.0" encoding="utf-8"?>
 <p:sld xmlns:a="http://schemas.openxmlformats.org/drawingml/2006/main" xmlns:r="http://schemas.openxmlformats.org/officeDocument/2006/relationships" xmlns:p="http://schemas.openxmlformats.org/presentationml/2006/main">
   <p:cSld>
     <p:spTree>
@@ -6154,7 +6709,7 @@
 </p:sld>
 </file>
 
-<file path=ppt/slides/slide4.xml><?xml version="1.0" encoding="utf-8"?>
+<file path=ppt/slides/slide5.xml><?xml version="1.0" encoding="utf-8"?>
 <p:sld xmlns:a="http://schemas.openxmlformats.org/drawingml/2006/main" xmlns:r="http://schemas.openxmlformats.org/officeDocument/2006/relationships" xmlns:p="http://schemas.openxmlformats.org/presentationml/2006/main">
   <p:cSld>
     <p:spTree>
@@ -6229,7 +6784,7 @@
         <p:spPr>
           <a:xfrm>
             <a:off x="133349" y="712252"/>
-            <a:ext cx="11877675" cy="1569660"/>
+            <a:ext cx="4834891" cy="1938992"/>
           </a:xfrm>
           <a:prstGeom prst="rect">
             <a:avLst/>
@@ -6345,6 +6900,96 @@
             <a:endParaRPr lang="fr-FR" sz="1200" dirty="0">
               <a:latin typeface="Raleway" pitchFamily="2" charset="0"/>
             </a:endParaRPr>
+          </a:p>
+        </p:txBody>
+      </p:sp>
+      <p:sp>
+        <p:nvSpPr>
+          <p:cNvPr id="3" name="ZoneTexte 2">
+            <a:extLst>
+              <a:ext uri="{FF2B5EF4-FFF2-40B4-BE49-F238E27FC236}">
+                <a16:creationId xmlns:a16="http://schemas.microsoft.com/office/drawing/2014/main" id="{F4F7F7B1-7DE9-97BD-2866-653D419BF6A1}"/>
+              </a:ext>
+            </a:extLst>
+          </p:cNvPr>
+          <p:cNvSpPr txBox="1"/>
+          <p:nvPr/>
+        </p:nvSpPr>
+        <p:spPr>
+          <a:xfrm>
+            <a:off x="4968241" y="103287"/>
+            <a:ext cx="3714750" cy="461665"/>
+          </a:xfrm>
+          <a:prstGeom prst="rect">
+            <a:avLst/>
+          </a:prstGeom>
+          <a:noFill/>
+        </p:spPr>
+        <p:txBody>
+          <a:bodyPr wrap="square" rtlCol="0">
+            <a:spAutoFit/>
+          </a:bodyPr>
+          <a:lstStyle/>
+          <a:p>
+            <a:r>
+              <a:rPr lang="fr-FR" sz="2400" dirty="0">
+                <a:latin typeface="Raleway" pitchFamily="2" charset="0"/>
+              </a:rPr>
+              <a:t>Problème</a:t>
+            </a:r>
+          </a:p>
+        </p:txBody>
+      </p:sp>
+      <p:sp>
+        <p:nvSpPr>
+          <p:cNvPr id="4" name="ZoneTexte 3">
+            <a:extLst>
+              <a:ext uri="{FF2B5EF4-FFF2-40B4-BE49-F238E27FC236}">
+                <a16:creationId xmlns:a16="http://schemas.microsoft.com/office/drawing/2014/main" id="{BD370FBF-820F-5C7E-02C5-9AB3905250C2}"/>
+              </a:ext>
+            </a:extLst>
+          </p:cNvPr>
+          <p:cNvSpPr txBox="1"/>
+          <p:nvPr/>
+        </p:nvSpPr>
+        <p:spPr>
+          <a:xfrm>
+            <a:off x="4968240" y="712252"/>
+            <a:ext cx="4834891" cy="276999"/>
+          </a:xfrm>
+          <a:prstGeom prst="rect">
+            <a:avLst/>
+          </a:prstGeom>
+          <a:noFill/>
+        </p:spPr>
+        <p:txBody>
+          <a:bodyPr wrap="square" rtlCol="0">
+            <a:spAutoFit/>
+          </a:bodyPr>
+          <a:lstStyle/>
+          <a:p>
+            <a:pPr marL="171450" indent="-171450">
+              <a:buFontTx/>
+              <a:buChar char="-"/>
+            </a:pPr>
+            <a:r>
+              <a:rPr lang="fr-FR" sz="1200" dirty="0">
+                <a:latin typeface="Raleway" pitchFamily="2" charset="0"/>
+              </a:rPr>
+              <a:t>Ne fonctionne pas si il manque un </a:t>
+            </a:r>
+            <a:r>
+              <a:rPr lang="fr-FR" sz="1200" dirty="0" err="1">
+                <a:latin typeface="Raleway" pitchFamily="2" charset="0"/>
+              </a:rPr>
+              <a:t>qr</a:t>
+            </a:r>
+            <a:r>
+              <a:rPr lang="fr-FR" sz="1200" dirty="0">
+                <a:latin typeface="Raleway" pitchFamily="2" charset="0"/>
+              </a:rPr>
+              <a:t> code fixe</a:t>
+            </a:r>
           </a:p>
         </p:txBody>
       </p:sp>

--- a/docs/architecture.pptx
+++ b/docs/architecture.pptx
@@ -7,9 +7,10 @@
   <p:sldIdLst>
     <p:sldId id="260" r:id="rId2"/>
     <p:sldId id="264" r:id="rId3"/>
-    <p:sldId id="261" r:id="rId4"/>
-    <p:sldId id="262" r:id="rId5"/>
-    <p:sldId id="263" r:id="rId6"/>
+    <p:sldId id="265" r:id="rId4"/>
+    <p:sldId id="261" r:id="rId5"/>
+    <p:sldId id="262" r:id="rId6"/>
+    <p:sldId id="263" r:id="rId7"/>
   </p:sldIdLst>
   <p:sldSz cx="12192000" cy="6858000"/>
   <p:notesSz cx="6858000" cy="9144000"/>
@@ -5442,6 +5443,166 @@
         <p:cNvPr id="1" name="">
           <a:extLst>
             <a:ext uri="{FF2B5EF4-FFF2-40B4-BE49-F238E27FC236}">
+              <a16:creationId xmlns:a16="http://schemas.microsoft.com/office/drawing/2014/main" id="{834C5B19-5ED6-9AA4-B5BD-B5BC19B32537}"/>
+            </a:ext>
+          </a:extLst>
+        </p:cNvPr>
+        <p:cNvGrpSpPr/>
+        <p:nvPr/>
+      </p:nvGrpSpPr>
+      <p:grpSpPr>
+        <a:xfrm>
+          <a:off x="0" y="0"/>
+          <a:ext cx="0" cy="0"/>
+          <a:chOff x="0" y="0"/>
+          <a:chExt cx="0" cy="0"/>
+        </a:xfrm>
+      </p:grpSpPr>
+      <p:sp>
+        <p:nvSpPr>
+          <p:cNvPr id="2" name="ZoneTexte 1">
+            <a:extLst>
+              <a:ext uri="{FF2B5EF4-FFF2-40B4-BE49-F238E27FC236}">
+                <a16:creationId xmlns:a16="http://schemas.microsoft.com/office/drawing/2014/main" id="{92EB21BB-34B3-371C-2660-DBD9999092D4}"/>
+              </a:ext>
+            </a:extLst>
+          </p:cNvPr>
+          <p:cNvSpPr txBox="1"/>
+          <p:nvPr/>
+        </p:nvSpPr>
+        <p:spPr>
+          <a:xfrm>
+            <a:off x="133350" y="93127"/>
+            <a:ext cx="3714750" cy="461665"/>
+          </a:xfrm>
+          <a:prstGeom prst="rect">
+            <a:avLst/>
+          </a:prstGeom>
+          <a:noFill/>
+        </p:spPr>
+        <p:txBody>
+          <a:bodyPr wrap="square" rtlCol="0">
+            <a:spAutoFit/>
+          </a:bodyPr>
+          <a:lstStyle/>
+          <a:p>
+            <a:r>
+              <a:rPr lang="fr-FR" sz="2400" dirty="0">
+                <a:latin typeface="Raleway" pitchFamily="2" charset="0"/>
+              </a:rPr>
+              <a:t>Documents</a:t>
+            </a:r>
+          </a:p>
+        </p:txBody>
+      </p:sp>
+      <p:sp>
+        <p:nvSpPr>
+          <p:cNvPr id="4" name="ZoneTexte 3">
+            <a:extLst>
+              <a:ext uri="{FF2B5EF4-FFF2-40B4-BE49-F238E27FC236}">
+                <a16:creationId xmlns:a16="http://schemas.microsoft.com/office/drawing/2014/main" id="{69737D44-EADA-F28E-C95A-0048D2CBA521}"/>
+              </a:ext>
+            </a:extLst>
+          </p:cNvPr>
+          <p:cNvSpPr txBox="1"/>
+          <p:nvPr/>
+        </p:nvSpPr>
+        <p:spPr>
+          <a:xfrm>
+            <a:off x="390525" y="885825"/>
+            <a:ext cx="10448925" cy="1754326"/>
+          </a:xfrm>
+          <a:prstGeom prst="rect">
+            <a:avLst/>
+          </a:prstGeom>
+          <a:noFill/>
+        </p:spPr>
+        <p:txBody>
+          <a:bodyPr wrap="square" rtlCol="0">
+            <a:spAutoFit/>
+          </a:bodyPr>
+          <a:lstStyle/>
+          <a:p>
+            <a:pPr marL="285750" indent="-285750">
+              <a:buFontTx/>
+              <a:buChar char="-"/>
+            </a:pPr>
+            <a:r>
+              <a:rPr lang="fr-FR" dirty="0" err="1"/>
+              <a:t>Picam</a:t>
+            </a:r>
+            <a:endParaRPr lang="fr-FR" dirty="0"/>
+          </a:p>
+          <a:p>
+            <a:pPr marL="742950" lvl="1" indent="-285750">
+              <a:buFontTx/>
+              <a:buChar char="-"/>
+            </a:pPr>
+            <a:r>
+              <a:rPr lang="fr-FR" dirty="0"/>
+              <a:t>Raspberry</a:t>
+            </a:r>
+          </a:p>
+          <a:p>
+            <a:pPr marL="1200150" lvl="2" indent="-285750">
+              <a:buFontTx/>
+              <a:buChar char="-"/>
+            </a:pPr>
+            <a:r>
+              <a:rPr lang="fr-FR" dirty="0"/>
+              <a:t>Src</a:t>
+            </a:r>
+          </a:p>
+          <a:p>
+            <a:pPr marL="1200150" lvl="2" indent="-285750">
+              <a:buFontTx/>
+              <a:buChar char="-"/>
+            </a:pPr>
+            <a:r>
+              <a:rPr lang="fr-FR" dirty="0"/>
+              <a:t>Tools</a:t>
+            </a:r>
+          </a:p>
+          <a:p>
+            <a:pPr marL="1200150" lvl="2" indent="-285750">
+              <a:buFontTx/>
+              <a:buChar char="-"/>
+            </a:pPr>
+            <a:r>
+              <a:rPr lang="fr-FR"/>
+              <a:t>Setup</a:t>
+            </a:r>
+          </a:p>
+          <a:p>
+            <a:pPr marL="742950" lvl="1" indent="-285750">
+              <a:buFontTx/>
+              <a:buChar char="-"/>
+            </a:pPr>
+            <a:endParaRPr lang="fr-FR"/>
+          </a:p>
+        </p:txBody>
+      </p:sp>
+    </p:spTree>
+    <p:extLst>
+      <p:ext uri="{BB962C8B-B14F-4D97-AF65-F5344CB8AC3E}">
+        <p14:creationId xmlns:p14="http://schemas.microsoft.com/office/powerpoint/2010/main" val="2483453228"/>
+      </p:ext>
+    </p:extLst>
+  </p:cSld>
+  <p:clrMapOvr>
+    <a:masterClrMapping/>
+  </p:clrMapOvr>
+</p:sld>
+</file>
+
+<file path=ppt/slides/slide4.xml><?xml version="1.0" encoding="utf-8"?>
+<p:sld xmlns:a="http://schemas.openxmlformats.org/drawingml/2006/main" xmlns:r="http://schemas.openxmlformats.org/officeDocument/2006/relationships" xmlns:p="http://schemas.openxmlformats.org/presentationml/2006/main">
+  <p:cSld>
+    <p:spTree>
+      <p:nvGrpSpPr>
+        <p:cNvPr id="1" name="">
+          <a:extLst>
+            <a:ext uri="{FF2B5EF4-FFF2-40B4-BE49-F238E27FC236}">
               <a16:creationId xmlns:a16="http://schemas.microsoft.com/office/drawing/2014/main" id="{7DABDDEB-1E2E-45E2-2D33-13096FA25AA2}"/>
             </a:ext>
           </a:extLst>
@@ -6564,7 +6725,7 @@
 </p:sld>
 </file>
 
-<file path=ppt/slides/slide4.xml><?xml version="1.0" encoding="utf-8"?>
+<file path=ppt/slides/slide5.xml><?xml version="1.0" encoding="utf-8"?>
 <p:sld xmlns:a="http://schemas.openxmlformats.org/drawingml/2006/main" xmlns:r="http://schemas.openxmlformats.org/officeDocument/2006/relationships" xmlns:p="http://schemas.openxmlformats.org/presentationml/2006/main">
   <p:cSld>
     <p:spTree>
@@ -6709,7 +6870,7 @@
 </p:sld>
 </file>
 
-<file path=ppt/slides/slide5.xml><?xml version="1.0" encoding="utf-8"?>
+<file path=ppt/slides/slide6.xml><?xml version="1.0" encoding="utf-8"?>
 <p:sld xmlns:a="http://schemas.openxmlformats.org/drawingml/2006/main" xmlns:r="http://schemas.openxmlformats.org/officeDocument/2006/relationships" xmlns:p="http://schemas.openxmlformats.org/presentationml/2006/main">
   <p:cSld>
     <p:spTree>

--- a/docs/architecture.pptx
+++ b/docs/architecture.pptx
@@ -11,6 +11,7 @@
     <p:sldId id="261" r:id="rId5"/>
     <p:sldId id="262" r:id="rId6"/>
     <p:sldId id="263" r:id="rId7"/>
+    <p:sldId id="266" r:id="rId8"/>
   </p:sldIdLst>
   <p:sldSz cx="12192000" cy="6858000"/>
   <p:notesSz cx="6858000" cy="9144000"/>
@@ -275,7 +276,7 @@
           <a:p>
             <a:fld id="{CEA30D6E-8026-458F-AE61-B945DF15BAB5}" type="datetimeFigureOut">
               <a:rPr lang="fr-FR" smtClean="0"/>
-              <a:t>28/11/2025</a:t>
+              <a:t>29/11/2025</a:t>
             </a:fld>
             <a:endParaRPr lang="fr-FR"/>
           </a:p>
@@ -473,7 +474,7 @@
           <a:p>
             <a:fld id="{CEA30D6E-8026-458F-AE61-B945DF15BAB5}" type="datetimeFigureOut">
               <a:rPr lang="fr-FR" smtClean="0"/>
-              <a:t>28/11/2025</a:t>
+              <a:t>29/11/2025</a:t>
             </a:fld>
             <a:endParaRPr lang="fr-FR"/>
           </a:p>
@@ -681,7 +682,7 @@
           <a:p>
             <a:fld id="{CEA30D6E-8026-458F-AE61-B945DF15BAB5}" type="datetimeFigureOut">
               <a:rPr lang="fr-FR" smtClean="0"/>
-              <a:t>28/11/2025</a:t>
+              <a:t>29/11/2025</a:t>
             </a:fld>
             <a:endParaRPr lang="fr-FR"/>
           </a:p>
@@ -879,7 +880,7 @@
           <a:p>
             <a:fld id="{CEA30D6E-8026-458F-AE61-B945DF15BAB5}" type="datetimeFigureOut">
               <a:rPr lang="fr-FR" smtClean="0"/>
-              <a:t>28/11/2025</a:t>
+              <a:t>29/11/2025</a:t>
             </a:fld>
             <a:endParaRPr lang="fr-FR"/>
           </a:p>
@@ -1154,7 +1155,7 @@
           <a:p>
             <a:fld id="{CEA30D6E-8026-458F-AE61-B945DF15BAB5}" type="datetimeFigureOut">
               <a:rPr lang="fr-FR" smtClean="0"/>
-              <a:t>28/11/2025</a:t>
+              <a:t>29/11/2025</a:t>
             </a:fld>
             <a:endParaRPr lang="fr-FR"/>
           </a:p>
@@ -1419,7 +1420,7 @@
           <a:p>
             <a:fld id="{CEA30D6E-8026-458F-AE61-B945DF15BAB5}" type="datetimeFigureOut">
               <a:rPr lang="fr-FR" smtClean="0"/>
-              <a:t>28/11/2025</a:t>
+              <a:t>29/11/2025</a:t>
             </a:fld>
             <a:endParaRPr lang="fr-FR"/>
           </a:p>
@@ -1831,7 +1832,7 @@
           <a:p>
             <a:fld id="{CEA30D6E-8026-458F-AE61-B945DF15BAB5}" type="datetimeFigureOut">
               <a:rPr lang="fr-FR" smtClean="0"/>
-              <a:t>28/11/2025</a:t>
+              <a:t>29/11/2025</a:t>
             </a:fld>
             <a:endParaRPr lang="fr-FR"/>
           </a:p>
@@ -1972,7 +1973,7 @@
           <a:p>
             <a:fld id="{CEA30D6E-8026-458F-AE61-B945DF15BAB5}" type="datetimeFigureOut">
               <a:rPr lang="fr-FR" smtClean="0"/>
-              <a:t>28/11/2025</a:t>
+              <a:t>29/11/2025</a:t>
             </a:fld>
             <a:endParaRPr lang="fr-FR"/>
           </a:p>
@@ -2085,7 +2086,7 @@
           <a:p>
             <a:fld id="{CEA30D6E-8026-458F-AE61-B945DF15BAB5}" type="datetimeFigureOut">
               <a:rPr lang="fr-FR" smtClean="0"/>
-              <a:t>28/11/2025</a:t>
+              <a:t>29/11/2025</a:t>
             </a:fld>
             <a:endParaRPr lang="fr-FR"/>
           </a:p>
@@ -2396,7 +2397,7 @@
           <a:p>
             <a:fld id="{CEA30D6E-8026-458F-AE61-B945DF15BAB5}" type="datetimeFigureOut">
               <a:rPr lang="fr-FR" smtClean="0"/>
-              <a:t>28/11/2025</a:t>
+              <a:t>29/11/2025</a:t>
             </a:fld>
             <a:endParaRPr lang="fr-FR"/>
           </a:p>
@@ -2684,7 +2685,7 @@
           <a:p>
             <a:fld id="{CEA30D6E-8026-458F-AE61-B945DF15BAB5}" type="datetimeFigureOut">
               <a:rPr lang="fr-FR" smtClean="0"/>
-              <a:t>28/11/2025</a:t>
+              <a:t>29/11/2025</a:t>
             </a:fld>
             <a:endParaRPr lang="fr-FR"/>
           </a:p>
@@ -2925,7 +2926,7 @@
           <a:p>
             <a:fld id="{CEA30D6E-8026-458F-AE61-B945DF15BAB5}" type="datetimeFigureOut">
               <a:rPr lang="fr-FR" smtClean="0"/>
-              <a:t>28/11/2025</a:t>
+              <a:t>29/11/2025</a:t>
             </a:fld>
             <a:endParaRPr lang="fr-FR"/>
           </a:p>
@@ -7167,6 +7168,1037 @@
 </p:sld>
 </file>
 
+<file path=ppt/slides/slide7.xml><?xml version="1.0" encoding="utf-8"?>
+<p:sld xmlns:a="http://schemas.openxmlformats.org/drawingml/2006/main" xmlns:r="http://schemas.openxmlformats.org/officeDocument/2006/relationships" xmlns:p="http://schemas.openxmlformats.org/presentationml/2006/main">
+  <p:cSld>
+    <p:spTree>
+      <p:nvGrpSpPr>
+        <p:cNvPr id="1" name="">
+          <a:extLst>
+            <a:ext uri="{FF2B5EF4-FFF2-40B4-BE49-F238E27FC236}">
+              <a16:creationId xmlns:a16="http://schemas.microsoft.com/office/drawing/2014/main" id="{6F2633EF-231C-69A1-C0B2-EDA7F789F917}"/>
+            </a:ext>
+          </a:extLst>
+        </p:cNvPr>
+        <p:cNvGrpSpPr/>
+        <p:nvPr/>
+      </p:nvGrpSpPr>
+      <p:grpSpPr>
+        <a:xfrm>
+          <a:off x="0" y="0"/>
+          <a:ext cx="0" cy="0"/>
+          <a:chOff x="0" y="0"/>
+          <a:chExt cx="0" cy="0"/>
+        </a:xfrm>
+      </p:grpSpPr>
+      <p:sp>
+        <p:nvSpPr>
+          <p:cNvPr id="29" name="ZoneTexte 28">
+            <a:extLst>
+              <a:ext uri="{FF2B5EF4-FFF2-40B4-BE49-F238E27FC236}">
+                <a16:creationId xmlns:a16="http://schemas.microsoft.com/office/drawing/2014/main" id="{7DD5A6E0-5BDC-59DF-14E7-1FDE6AD46EA1}"/>
+              </a:ext>
+            </a:extLst>
+          </p:cNvPr>
+          <p:cNvSpPr txBox="1"/>
+          <p:nvPr/>
+        </p:nvSpPr>
+        <p:spPr>
+          <a:xfrm>
+            <a:off x="133350" y="93127"/>
+            <a:ext cx="3714750" cy="461665"/>
+          </a:xfrm>
+          <a:prstGeom prst="rect">
+            <a:avLst/>
+          </a:prstGeom>
+          <a:noFill/>
+        </p:spPr>
+        <p:txBody>
+          <a:bodyPr wrap="square" rtlCol="0">
+            <a:spAutoFit/>
+          </a:bodyPr>
+          <a:lstStyle/>
+          <a:p>
+            <a:r>
+              <a:rPr lang="fr-FR" sz="2400" dirty="0">
+                <a:latin typeface="Raleway" pitchFamily="2" charset="0"/>
+              </a:rPr>
+              <a:t>Mécanique</a:t>
+            </a:r>
+          </a:p>
+        </p:txBody>
+      </p:sp>
+      <p:sp>
+        <p:nvSpPr>
+          <p:cNvPr id="5" name="Rectangle 4">
+            <a:extLst>
+              <a:ext uri="{FF2B5EF4-FFF2-40B4-BE49-F238E27FC236}">
+                <a16:creationId xmlns:a16="http://schemas.microsoft.com/office/drawing/2014/main" id="{184B1570-9F4A-30CF-7587-963506DAE149}"/>
+              </a:ext>
+            </a:extLst>
+          </p:cNvPr>
+          <p:cNvSpPr/>
+          <p:nvPr/>
+        </p:nvSpPr>
+        <p:spPr>
+          <a:xfrm>
+            <a:off x="1152525" y="1266824"/>
+            <a:ext cx="95250" cy="3914775"/>
+          </a:xfrm>
+          <a:prstGeom prst="rect">
+            <a:avLst/>
+          </a:prstGeom>
+          <a:noFill/>
+          <a:ln>
+            <a:solidFill>
+              <a:schemeClr val="tx1"/>
+            </a:solidFill>
+          </a:ln>
+        </p:spPr>
+        <p:style>
+          <a:lnRef idx="2">
+            <a:schemeClr val="accent1">
+              <a:shade val="15000"/>
+            </a:schemeClr>
+          </a:lnRef>
+          <a:fillRef idx="1">
+            <a:schemeClr val="accent1"/>
+          </a:fillRef>
+          <a:effectRef idx="0">
+            <a:schemeClr val="accent1"/>
+          </a:effectRef>
+          <a:fontRef idx="minor">
+            <a:schemeClr val="lt1"/>
+          </a:fontRef>
+        </p:style>
+        <p:txBody>
+          <a:bodyPr rtlCol="0" anchor="ctr"/>
+          <a:lstStyle/>
+          <a:p>
+            <a:pPr algn="ctr"/>
+            <a:endParaRPr lang="fr-FR"/>
+          </a:p>
+        </p:txBody>
+      </p:sp>
+      <p:sp>
+        <p:nvSpPr>
+          <p:cNvPr id="6" name="Rectangle 5">
+            <a:extLst>
+              <a:ext uri="{FF2B5EF4-FFF2-40B4-BE49-F238E27FC236}">
+                <a16:creationId xmlns:a16="http://schemas.microsoft.com/office/drawing/2014/main" id="{7B0A958B-3993-5770-7FA1-AFA43B699035}"/>
+              </a:ext>
+            </a:extLst>
+          </p:cNvPr>
+          <p:cNvSpPr/>
+          <p:nvPr/>
+        </p:nvSpPr>
+        <p:spPr>
+          <a:xfrm rot="5400000">
+            <a:off x="1145383" y="4833935"/>
+            <a:ext cx="109534" cy="804862"/>
+          </a:xfrm>
+          <a:prstGeom prst="rect">
+            <a:avLst/>
+          </a:prstGeom>
+          <a:noFill/>
+          <a:ln>
+            <a:solidFill>
+              <a:schemeClr val="tx1"/>
+            </a:solidFill>
+          </a:ln>
+        </p:spPr>
+        <p:style>
+          <a:lnRef idx="2">
+            <a:schemeClr val="accent1">
+              <a:shade val="15000"/>
+            </a:schemeClr>
+          </a:lnRef>
+          <a:fillRef idx="1">
+            <a:schemeClr val="accent1"/>
+          </a:fillRef>
+          <a:effectRef idx="0">
+            <a:schemeClr val="accent1"/>
+          </a:effectRef>
+          <a:fontRef idx="minor">
+            <a:schemeClr val="lt1"/>
+          </a:fontRef>
+        </p:style>
+        <p:txBody>
+          <a:bodyPr rtlCol="0" anchor="ctr"/>
+          <a:lstStyle/>
+          <a:p>
+            <a:pPr algn="ctr"/>
+            <a:endParaRPr lang="fr-FR"/>
+          </a:p>
+        </p:txBody>
+      </p:sp>
+      <p:pic>
+        <p:nvPicPr>
+          <p:cNvPr id="8" name="Image 7" descr="Une image contenant noir, obscurité&#10;&#10;Le contenu généré par l’IA peut être incorrect.">
+            <a:extLst>
+              <a:ext uri="{FF2B5EF4-FFF2-40B4-BE49-F238E27FC236}">
+                <a16:creationId xmlns:a16="http://schemas.microsoft.com/office/drawing/2014/main" id="{8DD7B7CD-7F27-50EE-EAEE-B67F04117E2C}"/>
+              </a:ext>
+            </a:extLst>
+          </p:cNvPr>
+          <p:cNvPicPr>
+            <a:picLocks noChangeAspect="1"/>
+          </p:cNvPicPr>
+          <p:nvPr/>
+        </p:nvPicPr>
+        <p:blipFill>
+          <a:blip r:embed="rId2">
+            <a:extLst>
+              <a:ext uri="{28A0092B-C50C-407E-A947-70E740481C1C}">
+                <a14:useLocalDpi xmlns:a14="http://schemas.microsoft.com/office/drawing/2010/main" val="0"/>
+              </a:ext>
+            </a:extLst>
+          </a:blip>
+          <a:stretch>
+            <a:fillRect/>
+          </a:stretch>
+        </p:blipFill>
+        <p:spPr>
+          <a:xfrm flipV="1">
+            <a:off x="1061884" y="5003515"/>
+            <a:ext cx="276531" cy="276531"/>
+          </a:xfrm>
+          <a:prstGeom prst="rect">
+            <a:avLst/>
+          </a:prstGeom>
+        </p:spPr>
+      </p:pic>
+      <p:pic>
+        <p:nvPicPr>
+          <p:cNvPr id="10" name="Graphique 9">
+            <a:extLst>
+              <a:ext uri="{FF2B5EF4-FFF2-40B4-BE49-F238E27FC236}">
+                <a16:creationId xmlns:a16="http://schemas.microsoft.com/office/drawing/2014/main" id="{89F972A1-EDF9-EA44-4A3B-9AA4843EDEA8}"/>
+              </a:ext>
+            </a:extLst>
+          </p:cNvPr>
+          <p:cNvPicPr>
+            <a:picLocks noChangeAspect="1"/>
+          </p:cNvPicPr>
+          <p:nvPr/>
+        </p:nvPicPr>
+        <p:blipFill>
+          <a:blip r:embed="rId3">
+            <a:extLst>
+              <a:ext uri="{96DAC541-7B7A-43D3-8B79-37D633B846F1}">
+                <asvg:svgBlip xmlns:asvg="http://schemas.microsoft.com/office/drawing/2016/SVG/main" r:embed="rId4"/>
+              </a:ext>
+            </a:extLst>
+          </a:blip>
+          <a:stretch>
+            <a:fillRect/>
+          </a:stretch>
+        </p:blipFill>
+        <p:spPr>
+          <a:xfrm>
+            <a:off x="1422581" y="1337168"/>
+            <a:ext cx="360000" cy="360000"/>
+          </a:xfrm>
+          <a:prstGeom prst="rect">
+            <a:avLst/>
+          </a:prstGeom>
+        </p:spPr>
+      </p:pic>
+      <p:sp>
+        <p:nvSpPr>
+          <p:cNvPr id="11" name="Rectangle 10">
+            <a:extLst>
+              <a:ext uri="{FF2B5EF4-FFF2-40B4-BE49-F238E27FC236}">
+                <a16:creationId xmlns:a16="http://schemas.microsoft.com/office/drawing/2014/main" id="{52B06541-AC01-40DA-BCB0-9183DEC329BA}"/>
+              </a:ext>
+            </a:extLst>
+          </p:cNvPr>
+          <p:cNvSpPr/>
+          <p:nvPr/>
+        </p:nvSpPr>
+        <p:spPr>
+          <a:xfrm rot="5400000">
+            <a:off x="1426851" y="4676597"/>
+            <a:ext cx="115716" cy="1373981"/>
+          </a:xfrm>
+          <a:prstGeom prst="rect">
+            <a:avLst/>
+          </a:prstGeom>
+          <a:noFill/>
+          <a:ln>
+            <a:solidFill>
+              <a:schemeClr val="tx2">
+                <a:lumMod val="50000"/>
+                <a:lumOff val="50000"/>
+              </a:schemeClr>
+            </a:solidFill>
+          </a:ln>
+        </p:spPr>
+        <p:style>
+          <a:lnRef idx="2">
+            <a:schemeClr val="accent1">
+              <a:shade val="15000"/>
+            </a:schemeClr>
+          </a:lnRef>
+          <a:fillRef idx="1">
+            <a:schemeClr val="accent1"/>
+          </a:fillRef>
+          <a:effectRef idx="0">
+            <a:schemeClr val="accent1"/>
+          </a:effectRef>
+          <a:fontRef idx="minor">
+            <a:schemeClr val="lt1"/>
+          </a:fontRef>
+        </p:style>
+        <p:txBody>
+          <a:bodyPr rtlCol="0" anchor="ctr"/>
+          <a:lstStyle/>
+          <a:p>
+            <a:pPr algn="ctr"/>
+            <a:endParaRPr lang="fr-FR"/>
+          </a:p>
+        </p:txBody>
+      </p:sp>
+      <p:sp>
+        <p:nvSpPr>
+          <p:cNvPr id="12" name="Rectangle 11">
+            <a:extLst>
+              <a:ext uri="{FF2B5EF4-FFF2-40B4-BE49-F238E27FC236}">
+                <a16:creationId xmlns:a16="http://schemas.microsoft.com/office/drawing/2014/main" id="{C638152E-7F39-641F-FDE8-F6240DC4C7EA}"/>
+              </a:ext>
+            </a:extLst>
+          </p:cNvPr>
+          <p:cNvSpPr/>
+          <p:nvPr/>
+        </p:nvSpPr>
+        <p:spPr>
+          <a:xfrm rot="10800000">
+            <a:off x="2171700" y="5305729"/>
+            <a:ext cx="133350" cy="704546"/>
+          </a:xfrm>
+          <a:prstGeom prst="rect">
+            <a:avLst/>
+          </a:prstGeom>
+          <a:noFill/>
+          <a:ln>
+            <a:solidFill>
+              <a:schemeClr val="tx2">
+                <a:lumMod val="50000"/>
+                <a:lumOff val="50000"/>
+              </a:schemeClr>
+            </a:solidFill>
+          </a:ln>
+        </p:spPr>
+        <p:style>
+          <a:lnRef idx="2">
+            <a:schemeClr val="accent1">
+              <a:shade val="15000"/>
+            </a:schemeClr>
+          </a:lnRef>
+          <a:fillRef idx="1">
+            <a:schemeClr val="accent1"/>
+          </a:fillRef>
+          <a:effectRef idx="0">
+            <a:schemeClr val="accent1"/>
+          </a:effectRef>
+          <a:fontRef idx="minor">
+            <a:schemeClr val="lt1"/>
+          </a:fontRef>
+        </p:style>
+        <p:txBody>
+          <a:bodyPr rtlCol="0" anchor="ctr"/>
+          <a:lstStyle/>
+          <a:p>
+            <a:pPr algn="ctr"/>
+            <a:endParaRPr lang="fr-FR"/>
+          </a:p>
+        </p:txBody>
+      </p:sp>
+      <p:sp>
+        <p:nvSpPr>
+          <p:cNvPr id="13" name="Rectangle 12">
+            <a:extLst>
+              <a:ext uri="{FF2B5EF4-FFF2-40B4-BE49-F238E27FC236}">
+                <a16:creationId xmlns:a16="http://schemas.microsoft.com/office/drawing/2014/main" id="{637FAE35-4E24-B8D0-71F9-A8097CB131F8}"/>
+              </a:ext>
+            </a:extLst>
+          </p:cNvPr>
+          <p:cNvSpPr/>
+          <p:nvPr/>
+        </p:nvSpPr>
+        <p:spPr>
+          <a:xfrm rot="5400000">
+            <a:off x="3200476" y="4848302"/>
+            <a:ext cx="133350" cy="2190598"/>
+          </a:xfrm>
+          <a:prstGeom prst="rect">
+            <a:avLst/>
+          </a:prstGeom>
+          <a:noFill/>
+          <a:ln>
+            <a:solidFill>
+              <a:schemeClr val="tx2">
+                <a:lumMod val="50000"/>
+                <a:lumOff val="50000"/>
+              </a:schemeClr>
+            </a:solidFill>
+          </a:ln>
+        </p:spPr>
+        <p:style>
+          <a:lnRef idx="2">
+            <a:schemeClr val="accent1">
+              <a:shade val="15000"/>
+            </a:schemeClr>
+          </a:lnRef>
+          <a:fillRef idx="1">
+            <a:schemeClr val="accent1"/>
+          </a:fillRef>
+          <a:effectRef idx="0">
+            <a:schemeClr val="accent1"/>
+          </a:effectRef>
+          <a:fontRef idx="minor">
+            <a:schemeClr val="lt1"/>
+          </a:fontRef>
+        </p:style>
+        <p:txBody>
+          <a:bodyPr rtlCol="0" anchor="ctr"/>
+          <a:lstStyle/>
+          <a:p>
+            <a:pPr algn="ctr"/>
+            <a:endParaRPr lang="fr-FR"/>
+          </a:p>
+        </p:txBody>
+      </p:sp>
+      <p:sp>
+        <p:nvSpPr>
+          <p:cNvPr id="15" name="Rectangle 14">
+            <a:extLst>
+              <a:ext uri="{FF2B5EF4-FFF2-40B4-BE49-F238E27FC236}">
+                <a16:creationId xmlns:a16="http://schemas.microsoft.com/office/drawing/2014/main" id="{670AF81B-6BE8-1FC0-EFFA-46BEEED84210}"/>
+              </a:ext>
+            </a:extLst>
+          </p:cNvPr>
+          <p:cNvSpPr/>
+          <p:nvPr/>
+        </p:nvSpPr>
+        <p:spPr>
+          <a:xfrm rot="5400000">
+            <a:off x="1145383" y="5086195"/>
+            <a:ext cx="109534" cy="804862"/>
+          </a:xfrm>
+          <a:prstGeom prst="rect">
+            <a:avLst/>
+          </a:prstGeom>
+          <a:noFill/>
+          <a:ln>
+            <a:solidFill>
+              <a:schemeClr val="tx1"/>
+            </a:solidFill>
+          </a:ln>
+        </p:spPr>
+        <p:style>
+          <a:lnRef idx="2">
+            <a:schemeClr val="accent1">
+              <a:shade val="15000"/>
+            </a:schemeClr>
+          </a:lnRef>
+          <a:fillRef idx="1">
+            <a:schemeClr val="accent1"/>
+          </a:fillRef>
+          <a:effectRef idx="0">
+            <a:schemeClr val="accent1"/>
+          </a:effectRef>
+          <a:fontRef idx="minor">
+            <a:schemeClr val="lt1"/>
+          </a:fontRef>
+        </p:style>
+        <p:txBody>
+          <a:bodyPr rtlCol="0" anchor="ctr"/>
+          <a:lstStyle/>
+          <a:p>
+            <a:pPr algn="ctr"/>
+            <a:endParaRPr lang="fr-FR"/>
+          </a:p>
+        </p:txBody>
+      </p:sp>
+      <p:sp>
+        <p:nvSpPr>
+          <p:cNvPr id="16" name="Triangle isocèle 15">
+            <a:extLst>
+              <a:ext uri="{FF2B5EF4-FFF2-40B4-BE49-F238E27FC236}">
+                <a16:creationId xmlns:a16="http://schemas.microsoft.com/office/drawing/2014/main" id="{5A5D0CCF-0817-6DAE-E360-CC6FAF0256E2}"/>
+              </a:ext>
+            </a:extLst>
+          </p:cNvPr>
+          <p:cNvSpPr/>
+          <p:nvPr/>
+        </p:nvSpPr>
+        <p:spPr>
+          <a:xfrm>
+            <a:off x="1095374" y="5555806"/>
+            <a:ext cx="209549" cy="352274"/>
+          </a:xfrm>
+          <a:prstGeom prst="triangle">
+            <a:avLst/>
+          </a:prstGeom>
+          <a:solidFill>
+            <a:schemeClr val="bg1"/>
+          </a:solidFill>
+        </p:spPr>
+        <p:style>
+          <a:lnRef idx="2">
+            <a:schemeClr val="accent1">
+              <a:shade val="15000"/>
+            </a:schemeClr>
+          </a:lnRef>
+          <a:fillRef idx="1">
+            <a:schemeClr val="accent1"/>
+          </a:fillRef>
+          <a:effectRef idx="0">
+            <a:schemeClr val="accent1"/>
+          </a:effectRef>
+          <a:fontRef idx="minor">
+            <a:schemeClr val="lt1"/>
+          </a:fontRef>
+        </p:style>
+        <p:txBody>
+          <a:bodyPr rtlCol="0" anchor="ctr"/>
+          <a:lstStyle/>
+          <a:p>
+            <a:pPr algn="ctr"/>
+            <a:endParaRPr lang="fr-FR"/>
+          </a:p>
+        </p:txBody>
+      </p:sp>
+      <p:pic>
+        <p:nvPicPr>
+          <p:cNvPr id="18" name="Image 17">
+            <a:extLst>
+              <a:ext uri="{FF2B5EF4-FFF2-40B4-BE49-F238E27FC236}">
+                <a16:creationId xmlns:a16="http://schemas.microsoft.com/office/drawing/2014/main" id="{54AECAEF-24BD-91D1-FD2E-26D90628560B}"/>
+              </a:ext>
+            </a:extLst>
+          </p:cNvPr>
+          <p:cNvPicPr>
+            <a:picLocks noChangeAspect="1"/>
+          </p:cNvPicPr>
+          <p:nvPr/>
+        </p:nvPicPr>
+        <p:blipFill>
+          <a:blip r:embed="rId5"/>
+          <a:stretch>
+            <a:fillRect/>
+          </a:stretch>
+        </p:blipFill>
+        <p:spPr>
+          <a:xfrm>
+            <a:off x="2047875" y="62941"/>
+            <a:ext cx="5630061" cy="3600953"/>
+          </a:xfrm>
+          <a:prstGeom prst="rect">
+            <a:avLst/>
+          </a:prstGeom>
+        </p:spPr>
+      </p:pic>
+      <p:pic>
+        <p:nvPicPr>
+          <p:cNvPr id="19" name="Graphique 18" descr="Processeur contour">
+            <a:extLst>
+              <a:ext uri="{FF2B5EF4-FFF2-40B4-BE49-F238E27FC236}">
+                <a16:creationId xmlns:a16="http://schemas.microsoft.com/office/drawing/2014/main" id="{FD9D5140-BC39-749E-FF54-E01DE5CBD3BE}"/>
+              </a:ext>
+            </a:extLst>
+          </p:cNvPr>
+          <p:cNvPicPr>
+            <a:picLocks noChangeAspect="1"/>
+          </p:cNvPicPr>
+          <p:nvPr/>
+        </p:nvPicPr>
+        <p:blipFill>
+          <a:blip r:embed="rId6">
+            <a:extLst>
+              <a:ext uri="{96DAC541-7B7A-43D3-8B79-37D633B846F1}">
+                <asvg:svgBlip xmlns:asvg="http://schemas.microsoft.com/office/drawing/2016/SVG/main" r:embed="rId7"/>
+              </a:ext>
+            </a:extLst>
+          </a:blip>
+          <a:stretch>
+            <a:fillRect/>
+          </a:stretch>
+        </p:blipFill>
+        <p:spPr>
+          <a:xfrm>
+            <a:off x="802047" y="3930508"/>
+            <a:ext cx="360000" cy="360000"/>
+          </a:xfrm>
+          <a:prstGeom prst="rect">
+            <a:avLst/>
+          </a:prstGeom>
+        </p:spPr>
+      </p:pic>
+      <p:pic>
+        <p:nvPicPr>
+          <p:cNvPr id="20" name="Graphique 19">
+            <a:extLst>
+              <a:ext uri="{FF2B5EF4-FFF2-40B4-BE49-F238E27FC236}">
+                <a16:creationId xmlns:a16="http://schemas.microsoft.com/office/drawing/2014/main" id="{9E0DFD91-1817-1D9B-A186-897C70A9753E}"/>
+              </a:ext>
+            </a:extLst>
+          </p:cNvPr>
+          <p:cNvPicPr>
+            <a:picLocks noChangeAspect="1"/>
+          </p:cNvPicPr>
+          <p:nvPr/>
+        </p:nvPicPr>
+        <p:blipFill>
+          <a:blip r:embed="rId8">
+            <a:extLst>
+              <a:ext uri="{96DAC541-7B7A-43D3-8B79-37D633B846F1}">
+                <asvg:svgBlip xmlns:asvg="http://schemas.microsoft.com/office/drawing/2016/SVG/main" r:embed="rId9"/>
+              </a:ext>
+            </a:extLst>
+          </a:blip>
+          <a:stretch>
+            <a:fillRect/>
+          </a:stretch>
+        </p:blipFill>
+        <p:spPr>
+          <a:xfrm>
+            <a:off x="72525" y="3930508"/>
+            <a:ext cx="360000" cy="360000"/>
+          </a:xfrm>
+          <a:prstGeom prst="rect">
+            <a:avLst/>
+          </a:prstGeom>
+        </p:spPr>
+      </p:pic>
+      <p:pic>
+        <p:nvPicPr>
+          <p:cNvPr id="21" name="Graphique 20">
+            <a:extLst>
+              <a:ext uri="{FF2B5EF4-FFF2-40B4-BE49-F238E27FC236}">
+                <a16:creationId xmlns:a16="http://schemas.microsoft.com/office/drawing/2014/main" id="{F79E7C09-64B1-1F75-8FFC-191F09FCB6BB}"/>
+              </a:ext>
+            </a:extLst>
+          </p:cNvPr>
+          <p:cNvPicPr>
+            <a:picLocks noChangeAspect="1"/>
+          </p:cNvPicPr>
+          <p:nvPr/>
+        </p:nvPicPr>
+        <p:blipFill>
+          <a:blip r:embed="rId10">
+            <a:extLst>
+              <a:ext uri="{96DAC541-7B7A-43D3-8B79-37D633B846F1}">
+                <asvg:svgBlip xmlns:asvg="http://schemas.microsoft.com/office/drawing/2016/SVG/main" r:embed="rId11"/>
+              </a:ext>
+            </a:extLst>
+          </a:blip>
+          <a:stretch>
+            <a:fillRect/>
+          </a:stretch>
+        </p:blipFill>
+        <p:spPr>
+          <a:xfrm>
+            <a:off x="437286" y="3930508"/>
+            <a:ext cx="360000" cy="360000"/>
+          </a:xfrm>
+          <a:prstGeom prst="rect">
+            <a:avLst/>
+          </a:prstGeom>
+        </p:spPr>
+      </p:pic>
+      <p:cxnSp>
+        <p:nvCxnSpPr>
+          <p:cNvPr id="23" name="Connecteur : en arc 22">
+            <a:extLst>
+              <a:ext uri="{FF2B5EF4-FFF2-40B4-BE49-F238E27FC236}">
+                <a16:creationId xmlns:a16="http://schemas.microsoft.com/office/drawing/2014/main" id="{79F2364F-9C41-7639-6D88-F970EE1B6C63}"/>
+              </a:ext>
+            </a:extLst>
+          </p:cNvPr>
+          <p:cNvCxnSpPr>
+            <a:endCxn id="21" idx="0"/>
+          </p:cNvCxnSpPr>
+          <p:nvPr/>
+        </p:nvCxnSpPr>
+        <p:spPr>
+          <a:xfrm rot="5400000">
+            <a:off x="-6736" y="2321191"/>
+            <a:ext cx="2233340" cy="985295"/>
+          </a:xfrm>
+          <a:prstGeom prst="curvedConnector3">
+            <a:avLst/>
+          </a:prstGeom>
+          <a:ln w="12700"/>
+        </p:spPr>
+        <p:style>
+          <a:lnRef idx="2">
+            <a:schemeClr val="dk1"/>
+          </a:lnRef>
+          <a:fillRef idx="0">
+            <a:schemeClr val="dk1"/>
+          </a:fillRef>
+          <a:effectRef idx="1">
+            <a:schemeClr val="dk1"/>
+          </a:effectRef>
+          <a:fontRef idx="minor">
+            <a:schemeClr val="tx1"/>
+          </a:fontRef>
+        </p:style>
+      </p:cxnSp>
+      <p:cxnSp>
+        <p:nvCxnSpPr>
+          <p:cNvPr id="25" name="Connecteur droit avec flèche 24">
+            <a:extLst>
+              <a:ext uri="{FF2B5EF4-FFF2-40B4-BE49-F238E27FC236}">
+                <a16:creationId xmlns:a16="http://schemas.microsoft.com/office/drawing/2014/main" id="{A24C8090-F84F-2BEB-F60F-5D124FAD70EB}"/>
+              </a:ext>
+            </a:extLst>
+          </p:cNvPr>
+          <p:cNvCxnSpPr>
+            <a:cxnSpLocks/>
+            <a:stCxn id="30" idx="1"/>
+            <a:endCxn id="13" idx="0"/>
+          </p:cNvCxnSpPr>
+          <p:nvPr/>
+        </p:nvCxnSpPr>
+        <p:spPr>
+          <a:xfrm flipH="1">
+            <a:off x="4362450" y="5943601"/>
+            <a:ext cx="571500" cy="0"/>
+          </a:xfrm>
+          <a:prstGeom prst="straightConnector1">
+            <a:avLst/>
+          </a:prstGeom>
+          <a:ln w="12700">
+            <a:tailEnd type="triangle"/>
+          </a:ln>
+        </p:spPr>
+        <p:style>
+          <a:lnRef idx="2">
+            <a:schemeClr val="dk1"/>
+          </a:lnRef>
+          <a:fillRef idx="0">
+            <a:schemeClr val="dk1"/>
+          </a:fillRef>
+          <a:effectRef idx="1">
+            <a:schemeClr val="dk1"/>
+          </a:effectRef>
+          <a:fontRef idx="minor">
+            <a:schemeClr val="tx1"/>
+          </a:fontRef>
+        </p:style>
+      </p:cxnSp>
+      <p:sp>
+        <p:nvSpPr>
+          <p:cNvPr id="30" name="ZoneTexte 29">
+            <a:extLst>
+              <a:ext uri="{FF2B5EF4-FFF2-40B4-BE49-F238E27FC236}">
+                <a16:creationId xmlns:a16="http://schemas.microsoft.com/office/drawing/2014/main" id="{5F234BE2-737E-7D0F-3B81-3AE9F80F9E2F}"/>
+              </a:ext>
+            </a:extLst>
+          </p:cNvPr>
+          <p:cNvSpPr txBox="1"/>
+          <p:nvPr/>
+        </p:nvSpPr>
+        <p:spPr>
+          <a:xfrm>
+            <a:off x="4933950" y="5816643"/>
+            <a:ext cx="1733550" cy="253916"/>
+          </a:xfrm>
+          <a:prstGeom prst="rect">
+            <a:avLst/>
+          </a:prstGeom>
+          <a:noFill/>
+        </p:spPr>
+        <p:txBody>
+          <a:bodyPr wrap="square" rtlCol="0">
+            <a:spAutoFit/>
+          </a:bodyPr>
+          <a:lstStyle/>
+          <a:p>
+            <a:r>
+              <a:rPr lang="fr-FR" sz="1050" dirty="0"/>
+              <a:t>Terrain en bleu</a:t>
+            </a:r>
+          </a:p>
+        </p:txBody>
+      </p:sp>
+      <p:cxnSp>
+        <p:nvCxnSpPr>
+          <p:cNvPr id="33" name="Connecteur droit avec flèche 32">
+            <a:extLst>
+              <a:ext uri="{FF2B5EF4-FFF2-40B4-BE49-F238E27FC236}">
+                <a16:creationId xmlns:a16="http://schemas.microsoft.com/office/drawing/2014/main" id="{3C11B420-BC32-C8EB-AA4D-A248163E284C}"/>
+              </a:ext>
+            </a:extLst>
+          </p:cNvPr>
+          <p:cNvCxnSpPr>
+            <a:cxnSpLocks/>
+            <a:stCxn id="34" idx="1"/>
+          </p:cNvCxnSpPr>
+          <p:nvPr/>
+        </p:nvCxnSpPr>
+        <p:spPr>
+          <a:xfrm flipH="1">
+            <a:off x="1310547" y="4364203"/>
+            <a:ext cx="571500" cy="0"/>
+          </a:xfrm>
+          <a:prstGeom prst="straightConnector1">
+            <a:avLst/>
+          </a:prstGeom>
+          <a:ln w="12700">
+            <a:tailEnd type="triangle"/>
+          </a:ln>
+        </p:spPr>
+        <p:style>
+          <a:lnRef idx="2">
+            <a:schemeClr val="dk1"/>
+          </a:lnRef>
+          <a:fillRef idx="0">
+            <a:schemeClr val="dk1"/>
+          </a:fillRef>
+          <a:effectRef idx="1">
+            <a:schemeClr val="dk1"/>
+          </a:effectRef>
+          <a:fontRef idx="minor">
+            <a:schemeClr val="tx1"/>
+          </a:fontRef>
+        </p:style>
+      </p:cxnSp>
+      <p:sp>
+        <p:nvSpPr>
+          <p:cNvPr id="34" name="ZoneTexte 33">
+            <a:extLst>
+              <a:ext uri="{FF2B5EF4-FFF2-40B4-BE49-F238E27FC236}">
+                <a16:creationId xmlns:a16="http://schemas.microsoft.com/office/drawing/2014/main" id="{712A9B50-144D-4F78-C4D8-1B4CDE3D6F26}"/>
+              </a:ext>
+            </a:extLst>
+          </p:cNvPr>
+          <p:cNvSpPr txBox="1"/>
+          <p:nvPr/>
+        </p:nvSpPr>
+        <p:spPr>
+          <a:xfrm>
+            <a:off x="1882047" y="4237245"/>
+            <a:ext cx="1733550" cy="253916"/>
+          </a:xfrm>
+          <a:prstGeom prst="rect">
+            <a:avLst/>
+          </a:prstGeom>
+          <a:noFill/>
+        </p:spPr>
+        <p:txBody>
+          <a:bodyPr wrap="square" rtlCol="0">
+            <a:spAutoFit/>
+          </a:bodyPr>
+          <a:lstStyle/>
+          <a:p>
+            <a:r>
+              <a:rPr lang="fr-FR" sz="1050" dirty="0"/>
+              <a:t>Profilé en alu</a:t>
+            </a:r>
+          </a:p>
+        </p:txBody>
+      </p:sp>
+      <p:cxnSp>
+        <p:nvCxnSpPr>
+          <p:cNvPr id="35" name="Connecteur droit avec flèche 34">
+            <a:extLst>
+              <a:ext uri="{FF2B5EF4-FFF2-40B4-BE49-F238E27FC236}">
+                <a16:creationId xmlns:a16="http://schemas.microsoft.com/office/drawing/2014/main" id="{E97387F9-7462-EAB2-B0CC-EF0080363E46}"/>
+              </a:ext>
+            </a:extLst>
+          </p:cNvPr>
+          <p:cNvCxnSpPr>
+            <a:cxnSpLocks/>
+            <a:stCxn id="36" idx="1"/>
+          </p:cNvCxnSpPr>
+          <p:nvPr/>
+        </p:nvCxnSpPr>
+        <p:spPr>
+          <a:xfrm flipH="1">
+            <a:off x="1762125" y="5215726"/>
+            <a:ext cx="571500" cy="0"/>
+          </a:xfrm>
+          <a:prstGeom prst="straightConnector1">
+            <a:avLst/>
+          </a:prstGeom>
+          <a:ln w="12700">
+            <a:tailEnd type="triangle"/>
+          </a:ln>
+        </p:spPr>
+        <p:style>
+          <a:lnRef idx="2">
+            <a:schemeClr val="dk1"/>
+          </a:lnRef>
+          <a:fillRef idx="0">
+            <a:schemeClr val="dk1"/>
+          </a:fillRef>
+          <a:effectRef idx="1">
+            <a:schemeClr val="dk1"/>
+          </a:effectRef>
+          <a:fontRef idx="minor">
+            <a:schemeClr val="tx1"/>
+          </a:fontRef>
+        </p:style>
+      </p:cxnSp>
+      <p:sp>
+        <p:nvSpPr>
+          <p:cNvPr id="36" name="ZoneTexte 35">
+            <a:extLst>
+              <a:ext uri="{FF2B5EF4-FFF2-40B4-BE49-F238E27FC236}">
+                <a16:creationId xmlns:a16="http://schemas.microsoft.com/office/drawing/2014/main" id="{62132102-CAE5-A2FE-2E47-4F84B6ED5D60}"/>
+              </a:ext>
+            </a:extLst>
+          </p:cNvPr>
+          <p:cNvSpPr txBox="1"/>
+          <p:nvPr/>
+        </p:nvSpPr>
+        <p:spPr>
+          <a:xfrm>
+            <a:off x="2333625" y="5088768"/>
+            <a:ext cx="1733550" cy="253916"/>
+          </a:xfrm>
+          <a:prstGeom prst="rect">
+            <a:avLst/>
+          </a:prstGeom>
+          <a:noFill/>
+        </p:spPr>
+        <p:txBody>
+          <a:bodyPr wrap="square" rtlCol="0">
+            <a:spAutoFit/>
+          </a:bodyPr>
+          <a:lstStyle/>
+          <a:p>
+            <a:r>
+              <a:rPr lang="fr-FR" sz="1050" dirty="0"/>
+              <a:t>Socle en bois</a:t>
+            </a:r>
+          </a:p>
+        </p:txBody>
+      </p:sp>
+      <p:cxnSp>
+        <p:nvCxnSpPr>
+          <p:cNvPr id="37" name="Connecteur droit avec flèche 36">
+            <a:extLst>
+              <a:ext uri="{FF2B5EF4-FFF2-40B4-BE49-F238E27FC236}">
+                <a16:creationId xmlns:a16="http://schemas.microsoft.com/office/drawing/2014/main" id="{6ED30E43-6EC9-CBF5-D18B-B19C8D76AE16}"/>
+              </a:ext>
+            </a:extLst>
+          </p:cNvPr>
+          <p:cNvCxnSpPr>
+            <a:cxnSpLocks/>
+            <a:stCxn id="38" idx="1"/>
+          </p:cNvCxnSpPr>
+          <p:nvPr/>
+        </p:nvCxnSpPr>
+        <p:spPr>
+          <a:xfrm flipH="1" flipV="1">
+            <a:off x="1422581" y="6010275"/>
+            <a:ext cx="911044" cy="509102"/>
+          </a:xfrm>
+          <a:prstGeom prst="straightConnector1">
+            <a:avLst/>
+          </a:prstGeom>
+          <a:ln w="12700">
+            <a:tailEnd type="triangle"/>
+          </a:ln>
+        </p:spPr>
+        <p:style>
+          <a:lnRef idx="2">
+            <a:schemeClr val="dk1"/>
+          </a:lnRef>
+          <a:fillRef idx="0">
+            <a:schemeClr val="dk1"/>
+          </a:fillRef>
+          <a:effectRef idx="1">
+            <a:schemeClr val="dk1"/>
+          </a:effectRef>
+          <a:fontRef idx="minor">
+            <a:schemeClr val="tx1"/>
+          </a:fontRef>
+        </p:style>
+      </p:cxnSp>
+      <p:sp>
+        <p:nvSpPr>
+          <p:cNvPr id="38" name="ZoneTexte 37">
+            <a:extLst>
+              <a:ext uri="{FF2B5EF4-FFF2-40B4-BE49-F238E27FC236}">
+                <a16:creationId xmlns:a16="http://schemas.microsoft.com/office/drawing/2014/main" id="{9DB3B95D-9477-AA99-4DE2-294BB4285BB8}"/>
+              </a:ext>
+            </a:extLst>
+          </p:cNvPr>
+          <p:cNvSpPr txBox="1"/>
+          <p:nvPr/>
+        </p:nvSpPr>
+        <p:spPr>
+          <a:xfrm>
+            <a:off x="2333625" y="6392419"/>
+            <a:ext cx="1733550" cy="253916"/>
+          </a:xfrm>
+          <a:prstGeom prst="rect">
+            <a:avLst/>
+          </a:prstGeom>
+          <a:noFill/>
+        </p:spPr>
+        <p:txBody>
+          <a:bodyPr wrap="square" rtlCol="0">
+            <a:spAutoFit/>
+          </a:bodyPr>
+          <a:lstStyle/>
+          <a:p>
+            <a:r>
+              <a:rPr lang="fr-FR" sz="1050" dirty="0"/>
+              <a:t>La fixation obligatoire</a:t>
+            </a:r>
+          </a:p>
+        </p:txBody>
+      </p:sp>
+      <p:pic>
+        <p:nvPicPr>
+          <p:cNvPr id="41" name="Image 40">
+            <a:extLst>
+              <a:ext uri="{FF2B5EF4-FFF2-40B4-BE49-F238E27FC236}">
+                <a16:creationId xmlns:a16="http://schemas.microsoft.com/office/drawing/2014/main" id="{BDFD9B3A-4B1D-7B99-589D-C10AC49069EB}"/>
+              </a:ext>
+            </a:extLst>
+          </p:cNvPr>
+          <p:cNvPicPr>
+            <a:picLocks noChangeAspect="1"/>
+          </p:cNvPicPr>
+          <p:nvPr/>
+        </p:nvPicPr>
+        <p:blipFill>
+          <a:blip r:embed="rId12"/>
+          <a:stretch>
+            <a:fillRect/>
+          </a:stretch>
+        </p:blipFill>
+        <p:spPr>
+          <a:xfrm>
+            <a:off x="7175116" y="15734"/>
+            <a:ext cx="4946519" cy="4594366"/>
+          </a:xfrm>
+          <a:prstGeom prst="rect">
+            <a:avLst/>
+          </a:prstGeom>
+        </p:spPr>
+      </p:pic>
+    </p:spTree>
+    <p:extLst>
+      <p:ext uri="{BB962C8B-B14F-4D97-AF65-F5344CB8AC3E}">
+        <p14:creationId xmlns:p14="http://schemas.microsoft.com/office/powerpoint/2010/main" val="505615753"/>
+      </p:ext>
+    </p:extLst>
+  </p:cSld>
+  <p:clrMapOvr>
+    <a:masterClrMapping/>
+  </p:clrMapOvr>
+</p:sld>
+</file>
+
 <file path=ppt/theme/theme1.xml><?xml version="1.0" encoding="utf-8"?>
 <a:theme xmlns:a="http://schemas.openxmlformats.org/drawingml/2006/main" name="Thème Office">
   <a:themeElements>
